--- a/Slides/Semana 7/semana_7_slides.pptx
+++ b/Slides/Semana 7/semana_7_slides.pptx
@@ -20,10 +20,9 @@
     <p:sldId id="268" r:id="rId14"/>
     <p:sldId id="269" r:id="rId15"/>
     <p:sldId id="270" r:id="rId16"/>
-    <p:sldId id="271" r:id="rId17"/>
   </p:sldIdLst>
   <p:notesMasterIdLst>
-    <p:notesMasterId r:id="rId18"/>
+    <p:notesMasterId r:id="rId17"/>
   </p:notesMasterIdLst>
   <p:sldSz cx="12192000" cy="6858000"/>
   <p:notesSz cx="6858000" cy="12192000"/>
@@ -517,7 +516,7 @@
           <a:p>
             <a:r>
               <a:rPr lang="en-US" dirty="0"/>
-              <a:t>Notas: Abertura da mini aula (20 min). Unidade II, entre a CF2 (Sem 5) e a CF3 (Sem 8). Mensagem central: nesta semana o material ganha PROFUNDIDADE. Nas Semanas 5-6 o Albedo passou de cor plana a imagem real; agora o Normal Map simula relevo e o Roughness varia dentro da mesma superfície — sem adicionar um único polígono. Saída da semana: o primeiro material PBR COMPLETO (Albedo + Metallic + Roughness + Normal). O Subsurface Scattering (SSS) NÃO é abordado nesta semana — foi movido para a Semana 8, junto ao sistema de camadas do 3D Coat, para não sobrecarregar esta mini-aula com um quinto conceito novo. Não é tutorial de cliques: é entender por que a luz "acredita" em uma superfície que não existe.</a:t>
+              <a:t>Notas: Abertura da mini aula (20 min). Unidade II, entre a Semana 6 e a CF2 (Semana 8). Mudança de ferramenta desta semana: o Blender deixa de ser onde o material é montado e passa a ser só exportação/reconexão. O 3D Coat entra como ferramenta dedicada de texturização — e entra cedo, porque a partir de hoje as duas trilhas visuais (fotorrealista e estilizada) usam o MESMO fluxo de ferramenta, divergindo só na camada de Color. Saída da semana: primeiro material PBR completo dentro do 3D Coat (Color + Roughness + Metallic + Normal via bake/pintura). SSS não é abordado hoje — vai para a Semana 8.</a:t>
             </a:r>
             <a:endParaRPr lang="en-US" dirty="0"/>
           </a:p>
@@ -605,12 +604,7 @@
           <a:p>
             <a:r>
               <a:rPr lang="en-US" dirty="0"/>
-              <a:t>Notas: A variação de Roughness é o que faz o material parecer USADO, não fabricado. Erro comum: dois marcadores do ColorRamp muito juntos (0.6 e 0.65) — a variação não aparece. Afastar para extremos. Mais importante: a variação precisa de intenção artística, não ser só ruído bonito. Referência de material real no Poly Haven ajuda a decidir onde há mais ou menos brilho.
-[!FIGURA]
-Objetivo didático: mostrar como o afastamento dos marcadores do ColorRamp converte ruído sem graça em variação de brilho legível.
-Arquivo sugerido: assets/colorramp_roughness.webp
-Descrição: à esquerda, um ColorRamp com marcadores próximos (0.60 e 0.65) e o render resultante com brilho uniforme. À direita, marcadores afastados (0.40 e 0.85) e o render com contraste visível entre áreas polidas e matte.
-Como produzir: no Blender, montar Noise → ColorRamp → Roughness, capturar o editor de nós e o Viewport Rendered com marcadores próximos, depois com marcadores afastados. Compor os dois estados no Krita.</a:t>
+              <a:t>Notas: Panorama de 3 min, não uma segunda mini aula. A partir de hoje o fluxo oficial da disciplina é o bake e a pintura dentro do 3D Coat. Leitura complementar recomendada, não avaliada nesta semana: Apostila, Parte IV, Cap. 13 — Texturização Procedural. Quem quiser comparar as duas técnicas pode aplicar nós em um Asset Secundário do kit mais adiante.</a:t>
             </a:r>
             <a:endParaRPr lang="en-US" dirty="0"/>
           </a:p>
@@ -698,7 +692,7 @@
           <a:p>
             <a:r>
               <a:rPr lang="en-US" dirty="0"/>
-              <a:t>Notas: Este é o conjunto mínimo de um material de jogo profissional — o marco da semana. Reforçar o Metallic quase binário: em PBR físico não há meio-termo. Ferrugem é dielétrico (Metallic 0) com a cor do ferrugem no Albedo, não Metallic intermediário. Amarrar ao Projeto Integrador: cada material do kit precisa dos quatro canais coerentes com o tema.</a:t>
+              <a:t>Notas: Os três erros mais frequentes da semana, alinhados ao bloco de dificuldades do plano. Circular no estúdio caçando exatamente estes padrões. Perguntas de mediação: "Essa camada de AO está em que modo de mistura?" / "Você usou o Curvature para clarear as arestas ou só pintou onde achou bonito?"</a:t>
             </a:r>
             <a:endParaRPr lang="en-US" dirty="0"/>
           </a:p>
@@ -786,7 +780,7 @@
           <a:p>
             <a:r>
               <a:rPr lang="en-US" dirty="0"/>
-              <a:t>Notas: Os três erros mais frequentes da semana, alinhados ao bloco de dificuldades do plano. Circular no estúdio caçando exatamente estes padrões. Para o canal errado: verificar o fio ROXO chegando à entrada Normal (abaixo de Roughness), vindo do Bump — nunca o fio amarelo do Noise direto. Para a escala: sugerir Texture Coordinate em Object para o Scale corresponder ao tamanho real do asset.</a:t>
+              <a:t>Notas: Contextualizar o valor profissional. O 3D Coat e o Substance Painter compartilham o mesmo princípio conceitual (camadas mascaradas por mapas gerados da malha) — o estudante que domina esse fluxo aqui transfere a lógica para qualquer ferramenta de mercado equivalente.</a:t>
             </a:r>
             <a:endParaRPr lang="en-US" dirty="0"/>
           </a:p>
@@ -874,7 +868,7 @@
           <a:p>
             <a:r>
               <a:rPr lang="en-US" dirty="0"/>
-              <a:t>Notas: Contextualizar o valor profissional. Geração procedural de texturas é competência central em produção real (Substance Designer é padrão de mercado) — mesmo quando o fluxo desta disciplina prioriza pintura manual no 3D Coat, é importante que o estudante saiba que essa outra via existe e é dominante na indústria. Amarra à Apostila, Parte IV, Cap. 13, que trata o tema com profundidade que a mini-aula desta semana só introduz.</a:t>
+              <a:t>Notas: Amarrar a mini aula. Cada item retorna na demonstração e no estúdio. Hoje é crítica INFORMAL; o foco é ler profundidade e coerência do material no trabalho dos colegas. Na Semana 8 (CF2, crítica FORMAL) o material é refinado e os quatro mapas PBR são exportados.</a:t>
             </a:r>
             <a:endParaRPr lang="en-US" dirty="0"/>
           </a:p>
@@ -962,7 +956,7 @@
           <a:p>
             <a:r>
               <a:rPr lang="en-US" dirty="0"/>
-              <a:t>Notas: Amarrar a mini aula. Cada item retorna na demonstração e no estúdio. Não reler tudo — apontar a conexão com a demo. Lembrar: hoje é crítica INFORMAL; o foco é ler profundidade e coerência do material no trabalho dos colegas. Na Semana 8 (CF FORMAL) o mesmo material vem no 3D Coat, e é lá que o Subsurface Scattering aparece como canal do sistema de camadas.</a:t>
+              <a:t>Notas: Consigna do estúdio (50 min). Bloco A (~15 min): concluir Albedo do Asset 02 no Blender, para quem ainda não tem. Bloco B (~35 min, toda a turma): exportar Asset 01, importar em Per-Pixel Painting/Metalness PBR/1024x1024, Color com textura da Semana 6 ou Smart Material, bakear AO/Curvature, camada de desgaste mascarada, Roughness guiado por Curvature, 2-3 marcas de Depth. Salvar: [Nome]_Asset01_3DCoat_S07. Papel do professor: verificar alinhamento de UV, uso de AO/Curvature como máscara (não como cor final) e coerência com a trilha escolhida.</a:t>
             </a:r>
             <a:endParaRPr lang="en-US" dirty="0"/>
           </a:p>
@@ -1050,7 +1044,12 @@
           <a:p>
             <a:r>
               <a:rPr lang="en-US" dirty="0"/>
-              <a:t>Notas: Consigna do estúdio. Dois blocos: quem falta terminar o Albedo do Asset 02 fecha isso primeiro (Bloco A, ~15 min); toda a turma adiciona Normal e Roughness (Bloco B). Nomenclatura: [Nome]_Asset01_PBR_S07.blend. Capturar screenshot do node tree + render comparativo antes/depois do Normal Map. Organizar em frames (Ctrl+J) é equivalente a organizar camadas no Krita.</a:t>
+              <a:t>Notas: Transição para a Demonstração de 20 min. Setup: Blender aberto com asset de demonstração (parede simples, textura seamless de pedra já no Albedo). 3D Coat aberto em outra janela. Seguir os 6 passos do slide "O percurso da migração". Fechar com: "eu não pintei nada com a mão até o passo 5 — essa profundidade toda veio da própria malha."
+[!FIGURA — produzir novo material, a imagem do deck anterior (Shader Editor / Viewport) não representa mais o fluxo desta semana]
+Objetivo didático: dar à turma um alvo visual do resultado esperado e antecipar o layout de tela da demonstração.
+Arquivo sugerido: assets/demo_migracao_3dcoat.webp (não existe ainda — precisa ser produzido)
+Descrição: tela dividida — à esquerda o Blender com o asset exportado, à direita o 3D Coat no Paint Room mostrando o painel de Layers com AO/Curvature já bakeados.
+Como produzir: capturar as duas janelas lado a lado durante um ensaio da demonstração e compor no Krita.</a:t>
             </a:r>
             <a:endParaRPr lang="en-US" dirty="0"/>
           </a:p>
@@ -1092,7 +1091,7 @@
 </p:notes>
 </file>
 
-<file path=ppt/notesSlides/notesSlide16.xml><?xml version="1.0" encoding="utf-8"?>
+<file path=ppt/notesSlides/notesSlide2.xml><?xml version="1.0" encoding="utf-8"?>
 <p:notes xmlns:a="http://schemas.openxmlformats.org/drawingml/2006/main" xmlns:r="http://schemas.openxmlformats.org/officeDocument/2006/relationships" xmlns:p="http://schemas.openxmlformats.org/presentationml/2006/main">
   <p:cSld>
     <p:spTree>
@@ -1138,12 +1137,7 @@
           <a:p>
             <a:r>
               <a:rPr lang="en-US" dirty="0"/>
-              <a:t>Notas: Transição para a demonstração de 20 min. Sequência: parede com Albedo da Semana 6 -&gt; Noise → Bump → Normal (calibrar Strength) -&gt; segundo Noise → ColorRamp → Roughness (afastar marcadores) -&gt; organizar em frames -&gt; comparar antes/depois desabilitando os frames com M. Não demonstrar SSS — ele fica para a Semana 8, junto ao sistema de camadas do 3D Coat. Fechar com a mensagem: o asset é idêntico geometricamente; o que mudou foi a informação que chegou ao cálculo de luz.
-[!FIGURA]
-Objetivo didático: dar à turma um alvo visual do resultado esperado e antecipar o layout de tela da demonstração.
-Arquivo sugerido: assets/demo_material_completo.webp
-Descrição: tela dividida. À esquerda, o Shader Editor do Blender com dois frames nomeados (Normal_Procedural e Roughness_Variacao) e os nós conectados ao Principled BSDF. À direita, o Viewport Rendered com a parede de pedra exibindo relevo e variação de brilho sob HDRI neutra.
-Como produzir: no Blender, montar o material completo com os dois frames organizados, ativar Viewport Rendered com HDRI neutra e capturar as duas áreas. Compor lado a lado no Krita.</a:t>
+              <a:t>Notas: Ler rápido. Cada objetivo retorna ao longo da aula. Objetivo 9 do plano (situar o bake dentro do conceito de texturização procedural da Semana 1) fica para o slide de panorama mais adiante. SSS não é tratado hoje — Semana 8.</a:t>
             </a:r>
             <a:endParaRPr lang="en-US" dirty="0"/>
           </a:p>
@@ -1166,7 +1160,7 @@
           <a:p>
             <a:fld id="{F7021451-1387-4CA6-816F-3879F97B5CBC}" type="slidenum">
               <a:rPr lang="en-US"/>
-              <a:t>16</a:t>
+              <a:t>2</a:t>
             </a:fld>
             <a:endParaRPr lang="en-US"/>
           </a:p>
@@ -1185,7 +1179,7 @@
 </p:notes>
 </file>
 
-<file path=ppt/notesSlides/notesSlide2.xml><?xml version="1.0" encoding="utf-8"?>
+<file path=ppt/notesSlides/notesSlide3.xml><?xml version="1.0" encoding="utf-8"?>
 <p:notes xmlns:a="http://schemas.openxmlformats.org/drawingml/2006/main" xmlns:r="http://schemas.openxmlformats.org/officeDocument/2006/relationships" xmlns:p="http://schemas.openxmlformats.org/presentationml/2006/main">
   <p:cSld>
     <p:spTree>
@@ -1231,7 +1225,12 @@
           <a:p>
             <a:r>
               <a:rPr lang="en-US" dirty="0"/>
-              <a:t>Notas: Ler rápido. Cada objetivo retorna ao longo da aula. Não antecipar 3D Coat (Semana 8) nem bake (Semana 11) — hoje tudo acontece com nós procedurais no Blender. SSS não é tratado hoje — fica para a Semana 8.</a:t>
+              <a:t>Notas: Abrir com comparação visual no projetor (imagens estáticas), três versões do mesmo asset de parede de pedra: (1) só Albedo — Semana 6. (2) + Ambient Occlusion multiplicado sobre o Albedo — reentrâncias escurecem. (3) + Curvature como máscara — arestas recebem desgaste/brilho diferenciado. Conduzir a turma a perceber que a resposta é a própria geometria do asset: reentrâncias, bordas e bevels. Aguardar 2-3 respostas antes de revelar o conceito.
+[!FIGURA — produzir novo material, o conteúdo mudou de Blender-procedural para 3D Coat/mesh maps]
+Objetivo didático: provocar a turma a perceber que a profundidade nasce da geometria, não de pintura manual, ancorando o conceito de mesh map antes da definição.
+Arquivo sugerido: assets/parede_ao_curvature_tres_estagios.webp (não existe ainda — precisa ser produzido)
+Descrição: a mesma parede de pedra em três painéis lado a lado — (1) só Albedo, (2) + AO multiplicado, (3) + Curvature como máscara de desgaste nas arestas.
+Como produzir: no 3D Coat, importar o asset de demonstração com a textura seamless da Semana 6 no Color, capturar o Render Room sem máscara, gerar AO e capturar de novo, gerar Curvature e aplicar como máscara de desgaste e capturar uma terceira vez. Compor os três lado a lado no Krita com rótulos.</a:t>
             </a:r>
             <a:endParaRPr lang="en-US" dirty="0"/>
           </a:p>
@@ -1254,7 +1253,7 @@
           <a:p>
             <a:fld id="{F7021451-1387-4CA6-816F-3879F97B5CBC}" type="slidenum">
               <a:rPr lang="en-US"/>
-              <a:t>2</a:t>
+              <a:t>3</a:t>
             </a:fld>
             <a:endParaRPr lang="en-US"/>
           </a:p>
@@ -1273,7 +1272,7 @@
 </p:notes>
 </file>
 
-<file path=ppt/notesSlides/notesSlide3.xml><?xml version="1.0" encoding="utf-8"?>
+<file path=ppt/notesSlides/notesSlide4.xml><?xml version="1.0" encoding="utf-8"?>
 <p:notes xmlns:a="http://schemas.openxmlformats.org/drawingml/2006/main" xmlns:r="http://schemas.openxmlformats.org/officeDocument/2006/relationships" xmlns:p="http://schemas.openxmlformats.org/presentationml/2006/main">
   <p:cSld>
     <p:spTree>
@@ -1319,12 +1318,7 @@
           <a:p>
             <a:r>
               <a:rPr lang="en-US" dirty="0"/>
-              <a:t>Notas: Abrir com a imagem estática de comparação no projetor (sem abrir software ainda). Três versões do MESMO asset: só Albedo / com Normal / com Normal + Roughness. Aguardar 2-3 respostas. O ponto-chave a extrair da turma: a GEOMETRIA é idêntica nos três casos — nenhum polígono foi adicionado. Confirmar e revelar o conceito no slide seguinte.
-[!FIGURA]
-Objetivo didático: provocar a turma a perceber que a diferença de profundidade não vem da geometria, ancorando o conceito antes da definição.
-Arquivo sugerido: assets/parede_tres_estagios.webp
-Descrição: a mesma parede de pedra em três painéis lado a lado. (1) só Albedo — superfície plana com a foto aplicada. (2) com Normal Map — blocos de pedra ganham volume, rachaduras e relevo. (3) com Normal + Roughness — algumas faces parecem polidas e outras matte.
-Como produzir: no Blender, montar uma parede simples com textura seamless da Semana 6 no Albedo e renderizar (painel 1). Adicionar Noise → Bump → Normal e renderizar (painel 2). Adicionar Noise → ColorRamp → Roughness e renderizar (painel 3). Compor os três lado a lado no Krita com rótulos.</a:t>
+              <a:t>Notas: Ponto central da mini aula. Ferramentas como 3D Coat e Substance Painter extraem essa informação direto da malha 3D. AO simula acúmulo natural de sombra/sujeira em reentrâncias. Curvature é o mapa mais útil para desgaste: bordas são onde a pintura descasca e o metal fica exposto — o oposto das reentrâncias.</a:t>
             </a:r>
             <a:endParaRPr lang="en-US" dirty="0"/>
           </a:p>
@@ -1347,7 +1341,7 @@
           <a:p>
             <a:fld id="{F7021451-1387-4CA6-816F-3879F97B5CBC}" type="slidenum">
               <a:rPr lang="en-US"/>
-              <a:t>3</a:t>
+              <a:t>4</a:t>
             </a:fld>
             <a:endParaRPr lang="en-US"/>
           </a:p>
@@ -1366,7 +1360,7 @@
 </p:notes>
 </file>
 
-<file path=ppt/notesSlides/notesSlide4.xml><?xml version="1.0" encoding="utf-8"?>
+<file path=ppt/notesSlides/notesSlide5.xml><?xml version="1.0" encoding="utf-8"?>
 <p:notes xmlns:a="http://schemas.openxmlformats.org/drawingml/2006/main" xmlns:r="http://schemas.openxmlformats.org/officeDocument/2006/relationships" xmlns:p="http://schemas.openxmlformats.org/presentationml/2006/main">
   <p:cSld>
     <p:spTree>
@@ -1412,7 +1406,7 @@
           <a:p>
             <a:r>
               <a:rPr lang="en-US" dirty="0"/>
-              <a:t>Notas: Fixar o conceito central. O Normal Map engana o cálculo de luz — a superfície permanece plana, mas a luz reage como se houvesse relevo. O tom azulado é consequência direta da codificação: B alto = Z alto = vetor apontando para fora da superfície. Amarrar ao custo de polígonos: em jogos em tempo real, simular relevo é muito mais barato que modelá-lo.</a:t>
+              <a:t>Notas: Diferença central em relação ao que a Semana 6 e a Apostila (Cap. 13) descrevem como via alternativa. O Normal Map desta semana nasce de pintura de profundidade, não de matemática de ruído. Preparar a turma para a Demonstração, onde isso é feito ao vivo.</a:t>
             </a:r>
             <a:endParaRPr lang="en-US" dirty="0"/>
           </a:p>
@@ -1435,7 +1429,7 @@
           <a:p>
             <a:fld id="{F7021451-1387-4CA6-816F-3879F97B5CBC}" type="slidenum">
               <a:rPr lang="en-US"/>
-              <a:t>4</a:t>
+              <a:t>5</a:t>
             </a:fld>
             <a:endParaRPr lang="en-US"/>
           </a:p>
@@ -1454,7 +1448,7 @@
 </p:notes>
 </file>
 
-<file path=ppt/notesSlides/notesSlide5.xml><?xml version="1.0" encoding="utf-8"?>
+<file path=ppt/notesSlides/notesSlide6.xml><?xml version="1.0" encoding="utf-8"?>
 <p:notes xmlns:a="http://schemas.openxmlformats.org/drawingml/2006/main" xmlns:r="http://schemas.openxmlformats.org/officeDocument/2006/relationships" xmlns:p="http://schemas.openxmlformats.org/presentationml/2006/main">
   <p:cSld>
     <p:spTree>
@@ -1500,7 +1494,7 @@
           <a:p>
             <a:r>
               <a:rPr lang="en-US" dirty="0"/>
-              <a:t>Notas: Não aprofundar além disso. A distinção importa porque explica por que o mapa é "colável" em qualquer asset — o espaço tangente acompanha a orientação local de cada face. Espaço objeto é citado só para contraste; nenhum estudante vai usá-lo esta semana.</a:t>
+              <a:t>Notas: Reforçar que não é um recomeço — é uma migração de ferramenta. O UV e o Albedo da Semana 6 seguem valendo; a diferença é o lugar onde o resto do material é construído. Isso tranquiliza estudantes que investiram tempo na textura seamless da semana passada.</a:t>
             </a:r>
             <a:endParaRPr lang="en-US" dirty="0"/>
           </a:p>
@@ -1523,7 +1517,7 @@
           <a:p>
             <a:fld id="{F7021451-1387-4CA6-816F-3879F97B5CBC}" type="slidenum">
               <a:rPr lang="en-US"/>
-              <a:t>5</a:t>
+              <a:t>6</a:t>
             </a:fld>
             <a:endParaRPr lang="en-US"/>
           </a:p>
@@ -1542,7 +1536,7 @@
 </p:notes>
 </file>
 
-<file path=ppt/notesSlides/notesSlide6.xml><?xml version="1.0" encoding="utf-8"?>
+<file path=ppt/notesSlides/notesSlide7.xml><?xml version="1.0" encoding="utf-8"?>
 <p:notes xmlns:a="http://schemas.openxmlformats.org/drawingml/2006/main" xmlns:r="http://schemas.openxmlformats.org/officeDocument/2006/relationships" xmlns:p="http://schemas.openxmlformats.org/presentationml/2006/main">
   <p:cSld>
     <p:spTree>
@@ -1588,7 +1582,7 @@
           <a:p>
             <a:r>
               <a:rPr lang="en-US" dirty="0"/>
-              <a:t>Notas: O Bump é mais simples porém menos preciso e não exporta bem para outros motores. Mas o nó Bump do Blender é justamente o atalho que usaremos hoje: ele converte a saída do Noise Texture em relevo, sem precisar de um Normal Map baked (isso vem na Semana 11).</a:t>
+              <a:t>Notas: Nos dois casos o resultado técnico é equivalente: Color + Roughness + Normal ativos, com máscaras de AO/Curvature orientando o desgaste. Quem baixou textura estilizada pronta na Semana 6 usa essa imagem como ponto de partida da camada de Color, igual à trilha fotorrealista usa a foto. Se a biblioteca de Smart Materials do laboratório for limitada, montar manualmente: camada de Color + variação com Brush + camada de desgaste mascarada por AO/Curvature — o conceito pedagógico é o mesmo.</a:t>
             </a:r>
             <a:endParaRPr lang="en-US" dirty="0"/>
           </a:p>
@@ -1611,7 +1605,7 @@
           <a:p>
             <a:fld id="{F7021451-1387-4CA6-816F-3879F97B5CBC}" type="slidenum">
               <a:rPr lang="en-US"/>
-              <a:t>6</a:t>
+              <a:t>7</a:t>
             </a:fld>
             <a:endParaRPr lang="en-US"/>
           </a:p>
@@ -1630,7 +1624,7 @@
 </p:notes>
 </file>
 
-<file path=ppt/notesSlides/notesSlide7.xml><?xml version="1.0" encoding="utf-8"?>
+<file path=ppt/notesSlides/notesSlide8.xml><?xml version="1.0" encoding="utf-8"?>
 <p:notes xmlns:a="http://schemas.openxmlformats.org/drawingml/2006/main" xmlns:r="http://schemas.openxmlformats.org/officeDocument/2006/relationships" xmlns:p="http://schemas.openxmlformats.org/presentationml/2006/main">
   <p:cSld>
     <p:spTree>
@@ -1676,7 +1670,7 @@
           <a:p>
             <a:r>
               <a:rPr lang="en-US" dirty="0"/>
-              <a:t>Notas: Apresentar o kit mínimo de nós. Não é preciso decorar parâmetros — a demonstração mostra cada um ao vivo. Atenção à versão do laboratório: no Blender 4.0 o Musgrave foi incorporado ao Noise Texture (via Detail/Roughness). Verificar antes da aula e adaptar a nomenclatura.</a:t>
+              <a:t>Notas: Orientação de interface, rápida. No workflow da disciplina os UVs já chegam prontos do Blender — o UV Room é checagem, não produção. Nomes exatos de painéis variam por versão do 3D Coat; verificar antes da aula.</a:t>
             </a:r>
             <a:endParaRPr lang="en-US" dirty="0"/>
           </a:p>
@@ -1699,7 +1693,7 @@
           <a:p>
             <a:fld id="{F7021451-1387-4CA6-816F-3879F97B5CBC}" type="slidenum">
               <a:rPr lang="en-US"/>
-              <a:t>7</a:t>
+              <a:t>8</a:t>
             </a:fld>
             <a:endParaRPr lang="en-US"/>
           </a:p>
@@ -1718,94 +1712,6 @@
 </p:notes>
 </file>
 
-<file path=ppt/notesSlides/notesSlide8.xml><?xml version="1.0" encoding="utf-8"?>
-<p:notes xmlns:a="http://schemas.openxmlformats.org/drawingml/2006/main" xmlns:r="http://schemas.openxmlformats.org/officeDocument/2006/relationships" xmlns:p="http://schemas.openxmlformats.org/presentationml/2006/main">
-  <p:cSld>
-    <p:spTree>
-      <p:nvGrpSpPr>
-        <p:cNvPr id="1" name=""/>
-        <p:cNvGrpSpPr/>
-        <p:nvPr/>
-      </p:nvGrpSpPr>
-      <p:grpSpPr>
-        <a:xfrm>
-          <a:off x="0" y="0"/>
-          <a:ext cx="0" cy="0"/>
-          <a:chOff x="0" y="0"/>
-          <a:chExt cx="0" cy="0"/>
-        </a:xfrm>
-      </p:grpSpPr>
-      <p:sp>
-        <p:nvSpPr>
-          <p:cNvPr id="2" name="Slide Image Placeholder 1"/>
-          <p:cNvSpPr>
-            <a:spLocks noGrp="1" noRot="1" noChangeAspect="1"/>
-          </p:cNvSpPr>
-          <p:nvPr>
-            <p:ph type="sldImg"/>
-          </p:nvPr>
-        </p:nvSpPr>
-        <p:spPr/>
-      </p:sp>
-      <p:sp>
-        <p:nvSpPr>
-          <p:cNvPr id="3" name="Notes Placeholder 2"/>
-          <p:cNvSpPr>
-            <a:spLocks noGrp="1"/>
-          </p:cNvSpPr>
-          <p:nvPr>
-            <p:ph type="body" idx="1"/>
-          </p:nvPr>
-        </p:nvSpPr>
-        <p:spPr/>
-        <p:txBody>
-          <a:bodyPr/>
-          <a:lstStyle/>
-          <a:p>
-            <a:r>
-              <a:rPr lang="en-US" dirty="0"/>
-              <a:t>Notas: Núcleo procedimental. Dois caminhos independentes que chegam a canais diferentes do Principled BSDF: um Noise vira relevo (via Bump → Normal), outro Noise vira variação de brilho (via ColorRamp → Roughness). São dois Noise Texture SEPARADOS — não reaproveitar o mesmo nó. O GitHub Action converte o mermaid em imagem.</a:t>
-            </a:r>
-            <a:endParaRPr lang="en-US" dirty="0"/>
-          </a:p>
-        </p:txBody>
-      </p:sp>
-      <p:sp>
-        <p:nvSpPr>
-          <p:cNvPr id="4" name="Slide Number Placeholder 3"/>
-          <p:cNvSpPr>
-            <a:spLocks noGrp="1"/>
-          </p:cNvSpPr>
-          <p:nvPr>
-            <p:ph type="sldNum" sz="quarter" idx="10"/>
-          </p:nvPr>
-        </p:nvSpPr>
-        <p:spPr/>
-        <p:txBody>
-          <a:bodyPr/>
-          <a:lstStyle/>
-          <a:p>
-            <a:fld id="{F7021451-1387-4CA6-816F-3879F97B5CBC}" type="slidenum">
-              <a:rPr lang="en-US"/>
-              <a:t>8</a:t>
-            </a:fld>
-            <a:endParaRPr lang="en-US"/>
-          </a:p>
-        </p:txBody>
-      </p:sp>
-    </p:spTree>
-    <p:extLst>
-      <p:ext uri="{BB962C8B-B14F-4D97-AF65-F5344CB8AC3E}">
-        <p14:creationId xmlns:p14="http://schemas.microsoft.com/office/powerpoint/2010/main" val="1024086991"/>
-      </p:ext>
-    </p:extLst>
-  </p:cSld>
-  <p:clrMapOvr>
-    <a:masterClrMapping/>
-  </p:clrMapOvr>
-</p:notes>
-</file>
-
 <file path=ppt/notesSlides/notesSlide9.xml><?xml version="1.0" encoding="utf-8"?>
 <p:notes xmlns:a="http://schemas.openxmlformats.org/drawingml/2006/main" xmlns:r="http://schemas.openxmlformats.org/officeDocument/2006/relationships" xmlns:p="http://schemas.openxmlformats.org/presentationml/2006/main">
   <p:cSld>
@@ -1852,12 +1758,11 @@
           <a:p>
             <a:r>
               <a:rPr lang="en-US" dirty="0"/>
-              <a:t>Notas: Erro de calibração nº 1 do estúdio. O valor padrão exagera o relevo. Orientar a comparar com referência real (foto do Poly Haven do mesmo material) e baixar o Strength progressivamente até o relevo parecer crível. A estrutura do nó não muda — só a intensidade.
-[!FIGURA]
-Objetivo didático: mostrar visualmente que o mesmo Normal Map procedural muda completamente conforme o Strength, ancorando a noção de calibração.
-Arquivo sugerido: assets/bump_strength_comparacao.webp
-Descrição: a mesma parede de pedra em três painéis, com Strength do nó Bump em 1.0 (exagerado, aspecto de cratera), 0.3 (crível) e 0.05 (quase imperceptível).
-Como produzir: no Blender, montar Noise → Bump → Normal em uma parede, renderizar em Viewport Rendered com Strength 1.0, 0.3 e 0.05, capturar cada estado e compor lado a lado no Krita com os valores rotulados.</a:t>
+              <a:t>Notas: Roteiro da Demonstração (20 min) e também da Produção em Estúdio. Passo 1: File → Export → FBX, preferir FBX com mais de um objeto. Passo 2: File → Import for Per-Pixel Painting, confirmar UV e resolução. Passo 4: painel de geração varia por versão — geralmente em Textures ou como Fill Layer com gerador procedural; alternativa manual se instável: pincel de opacidade baixa nas reentrâncias/arestas. Passo 6: canal Roughness recebe o mesmo tratamento por Curvature logo em seguida (arestas mais polidas).
+[!FIGURA — produzir novo material, o diagrama Noise/Bump/ColorRamp do deck anterior não se aplica mais]
+Objetivo didático: dar suporte visual ao roteiro de 6 passos da migração Blender → 3D Coat.
+Arquivo sugerido: assets/fluxo_migracao_3dcoat.png (não existe ainda — precisa ser produzido, por exemplo via o mesmo pipeline de mermaid → imagem já usado no deck da Semana 7 anterior)
+Descrição: fluxograma linear com os 6 passos acima, destacando que os passos 4 e 6 usam a mesma máscara de Curvature.</a:t>
             </a:r>
             <a:endParaRPr lang="en-US" dirty="0"/>
           </a:p>
@@ -2443,45 +2348,6 @@
 <file path=ppt/slides/slide15.xml><?xml version="1.0" encoding="utf-8"?>
 <p:sld xmlns:a="http://schemas.openxmlformats.org/drawingml/2006/main" xmlns:r="http://schemas.openxmlformats.org/officeDocument/2006/relationships" xmlns:p="http://schemas.openxmlformats.org/presentationml/2006/main">
   <p:cSld name="Slide 15">
-    <p:bg>
-      <p:bgPr>
-        <a:blipFill dpi="0" rotWithShape="1">
-          <a:blip r:embed="rId1">
-            <a:lum/>
-          </a:blip>
-          <a:srcRect/>
-          <a:stretch>
-            <a:fillRect/>
-          </a:stretch>
-        </a:blipFill>
-        <a:effectLst/>
-      </p:bgPr>
-    </p:bg>
-    <p:spTree>
-      <p:nvGrpSpPr>
-        <p:cNvPr id="1" name=""/>
-        <p:cNvGrpSpPr/>
-        <p:nvPr/>
-      </p:nvGrpSpPr>
-      <p:grpSpPr>
-        <a:xfrm>
-          <a:off x="0" y="0"/>
-          <a:ext cx="0" cy="0"/>
-          <a:chOff x="0" y="0"/>
-          <a:chExt cx="0" cy="0"/>
-        </a:xfrm>
-      </p:grpSpPr>
-    </p:spTree>
-  </p:cSld>
-  <p:clrMapOvr>
-    <a:masterClrMapping/>
-  </p:clrMapOvr>
-</p:sld>
-</file>
-
-<file path=ppt/slides/slide16.xml><?xml version="1.0" encoding="utf-8"?>
-<p:sld xmlns:a="http://schemas.openxmlformats.org/drawingml/2006/main" xmlns:r="http://schemas.openxmlformats.org/officeDocument/2006/relationships" xmlns:p="http://schemas.openxmlformats.org/presentationml/2006/main">
-  <p:cSld name="Slide 16">
     <p:bg>
       <p:bgPr>
         <a:blipFill dpi="0" rotWithShape="1">

--- a/Slides/Semana 7/semana_7_slides.pptx
+++ b/Slides/Semana 7/semana_7_slides.pptx
@@ -20,9 +20,16 @@
     <p:sldId id="268" r:id="rId14"/>
     <p:sldId id="269" r:id="rId15"/>
     <p:sldId id="270" r:id="rId16"/>
+    <p:sldId id="271" r:id="rId17"/>
+    <p:sldId id="272" r:id="rId18"/>
+    <p:sldId id="273" r:id="rId19"/>
+    <p:sldId id="274" r:id="rId20"/>
+    <p:sldId id="275" r:id="rId21"/>
+    <p:sldId id="276" r:id="rId22"/>
+    <p:sldId id="277" r:id="rId23"/>
   </p:sldIdLst>
   <p:notesMasterIdLst>
-    <p:notesMasterId r:id="rId17"/>
+    <p:notesMasterId r:id="rId24"/>
   </p:notesMasterIdLst>
   <p:sldSz cx="12192000" cy="6858000"/>
   <p:notesSz cx="6858000" cy="12192000"/>
@@ -516,7 +523,7 @@
           <a:p>
             <a:r>
               <a:rPr lang="en-US" dirty="0"/>
-              <a:t>Notas: Abertura da mini aula (20 min). Unidade II, entre a Semana 6 e a CF2 (Semana 8). Mudança de ferramenta desta semana: o Blender deixa de ser onde o material é montado e passa a ser só exportação/reconexão. O 3D Coat entra como ferramenta dedicada de texturização — e entra cedo, porque a partir de hoje as duas trilhas visuais (fotorrealista e estilizada) usam o MESMO fluxo de ferramenta, divergindo só na camada de Color. Saída da semana: primeiro material PBR completo dentro do 3D Coat (Color + Roughness + Metallic + Normal via bake/pintura). SSS não é abordado hoje — vai para a Semana 8.</a:t>
+              <a:t>Notas: Marcar a virada de ferramenta: o Blender deixa de montar o material e passa a só exportar a malha e receber os mapas de volta. O 3D Coat entra como ferramenta dedicada — e as duas trilhas visuais passam a usar o mesmo fluxo de ferramenta a partir de hoje. Sem crítica formal — a CF2 é na Semana 8.</a:t>
             </a:r>
             <a:endParaRPr lang="en-US" dirty="0"/>
           </a:p>
@@ -604,7 +611,7 @@
           <a:p>
             <a:r>
               <a:rPr lang="en-US" dirty="0"/>
-              <a:t>Notas: Panorama de 3 min, não uma segunda mini aula. A partir de hoje o fluxo oficial da disciplina é o bake e a pintura dentro do 3D Coat. Leitura complementar recomendada, não avaliada nesta semana: Apostila, Parte IV, Cap. 13 — Texturização Procedural. Quem quiser comparar as duas técnicas pode aplicar nós em um Asset Secundário do kit mais adiante.</a:t>
+              <a:t>Notas: Panorama de 3 min, não é conteúdo obrigatório. Nota: o Subsurface Scattering (SSS) não entra hoje — é apresentado na Semana 8, para não sobrecarregar esta mini aula.</a:t>
             </a:r>
             <a:endParaRPr lang="en-US" dirty="0"/>
           </a:p>
@@ -692,7 +699,7 @@
           <a:p>
             <a:r>
               <a:rPr lang="en-US" dirty="0"/>
-              <a:t>Notas: Os três erros mais frequentes da semana, alinhados ao bloco de dificuldades do plano. Circular no estúdio caçando exatamente estes padrões. Perguntas de mediação: "Essa camada de AO está em que modo de mistura?" / "Você usou o Curvature para clarear as arestas ou só pintou onde achou bonito?"</a:t>
+              <a:t>Notas: Amarrar a C4 (Materiais PBR) e C5 (Texturização), observados hoje e avaliados formalmente na CF2 (Semana 8).</a:t>
             </a:r>
             <a:endParaRPr lang="en-US" dirty="0"/>
           </a:p>
@@ -780,7 +787,7 @@
           <a:p>
             <a:r>
               <a:rPr lang="en-US" dirty="0"/>
-              <a:t>Notas: Contextualizar o valor profissional. O 3D Coat e o Substance Painter compartilham o mesmo princípio conceitual (camadas mascaradas por mapas gerados da malha) — o estudante que domina esse fluxo aqui transfere a lógica para qualquer ferramenta de mercado equivalente.</a:t>
+              <a:t>Notas: Fechar a mini aula amarrando os conceitos antes da demonstração.</a:t>
             </a:r>
             <a:endParaRPr lang="en-US" dirty="0"/>
           </a:p>
@@ -868,7 +875,12 @@
           <a:p>
             <a:r>
               <a:rPr lang="en-US" dirty="0"/>
-              <a:t>Notas: Amarrar a mini aula. Cada item retorna na demonstração e no estúdio. Hoje é crítica INFORMAL; o foco é ler profundidade e coerência do material no trabalho dos colegas. Na Semana 8 (CF2, crítica FORMAL) o material é refinado e os quatro mapas PBR são exportados.</a:t>
+              <a:t>Notas: Transição para os 20 min de demonstração. Passo a passo: (1) exportar FBX com UV, (2) importar Per-Pixel Painting / Metalness PBR / 1024×1024, (3) camada de Color com a textura da Semana 6, (4) bake de AO e Curvature + camada de desgaste em modo Multiply, (5) Normal via pincel de Depth (rachadura, entalhe), (6) Roughness com Fill base + camada guiada por Curvature.
+[!FIGURA]
+Objetivo didático — Mostrar a sequência do fluxo de migração Blender → 3D Coat até o material com três canais ativos.
+Arquivo sugerido — assets/demo_3dcoat_bake_workflow.webp
+Descrição — Sequência de 4 capturas de tela do 3D Coat lado a lado: malha recém-importada sem textura, com camada de Color aplicada, com AO/Curvature bakeados e aplicados como máscara de desgaste, e com as primeiras marcas de Normal pintadas no Depth.
+Como produzir — Capturar no 3D Coat usando o asset de demonstração do professor (parede simples com textura seamless da Semana 6), salvando cada etapa do Paint Room.</a:t>
             </a:r>
             <a:endParaRPr lang="en-US" dirty="0"/>
           </a:p>
@@ -956,7 +968,7 @@
           <a:p>
             <a:r>
               <a:rPr lang="en-US" dirty="0"/>
-              <a:t>Notas: Consigna do estúdio (50 min). Bloco A (~15 min): concluir Albedo do Asset 02 no Blender, para quem ainda não tem. Bloco B (~35 min, toda a turma): exportar Asset 01, importar em Per-Pixel Painting/Metalness PBR/1024x1024, Color com textura da Semana 6 ou Smart Material, bakear AO/Curvature, camada de desgaste mascarada, Roughness guiado por Curvature, 2-3 marcas de Depth. Salvar: [Nome]_Asset01_3DCoat_S07. Papel do professor: verificar alinhamento de UV, uso de AO/Curvature como máscara (não como cor final) e coerência com a trilha escolhida.</a:t>
+              <a:t>Notas: Divisória entre a mini aula e o estúdio. Os slides a seguir ficam projetados durante a produção — servem de consigna e timebox visíveis, apresentados um a um conforme a etapa correspondente começa.</a:t>
             </a:r>
             <a:endParaRPr lang="en-US" dirty="0"/>
           </a:p>
@@ -1044,12 +1056,7 @@
           <a:p>
             <a:r>
               <a:rPr lang="en-US" dirty="0"/>
-              <a:t>Notas: Transição para a Demonstração de 20 min. Setup: Blender aberto com asset de demonstração (parede simples, textura seamless de pedra já no Albedo). 3D Coat aberto em outra janela. Seguir os 6 passos do slide "O percurso da migração". Fechar com: "eu não pintei nada com a mão até o passo 5 — essa profundidade toda veio da própria malha."
-[!FIGURA — produzir novo material, a imagem do deck anterior (Shader Editor / Viewport) não representa mais o fluxo desta semana]
-Objetivo didático: dar à turma um alvo visual do resultado esperado e antecipar o layout de tela da demonstração.
-Arquivo sugerido: assets/demo_migracao_3dcoat.webp (não existe ainda — precisa ser produzido)
-Descrição: tela dividida — à esquerda o Blender com o asset exportado, à direita o 3D Coat no Paint Room mostrando o painel de Layers com AO/Curvature já bakeados.
-Como produzir: capturar as duas janelas lado a lado durante um ensaio da demonstração e compor no Krita.</a:t>
+              <a:t>Notas: Encontro 1. Verificar se o UV importou corretamente no UV Room. Em computadores mais lentos, orientar para 512×512.</a:t>
             </a:r>
             <a:endParaRPr lang="en-US" dirty="0"/>
           </a:p>
@@ -1091,6 +1098,358 @@
 </p:notes>
 </file>
 
+<file path=ppt/notesSlides/notesSlide16.xml><?xml version="1.0" encoding="utf-8"?>
+<p:notes xmlns:a="http://schemas.openxmlformats.org/drawingml/2006/main" xmlns:r="http://schemas.openxmlformats.org/officeDocument/2006/relationships" xmlns:p="http://schemas.openxmlformats.org/presentationml/2006/main">
+  <p:cSld>
+    <p:spTree>
+      <p:nvGrpSpPr>
+        <p:cNvPr id="1" name=""/>
+        <p:cNvGrpSpPr/>
+        <p:nvPr/>
+      </p:nvGrpSpPr>
+      <p:grpSpPr>
+        <a:xfrm>
+          <a:off x="0" y="0"/>
+          <a:ext cx="0" cy="0"/>
+          <a:chOff x="0" y="0"/>
+          <a:chExt cx="0" cy="0"/>
+        </a:xfrm>
+      </p:grpSpPr>
+      <p:sp>
+        <p:nvSpPr>
+          <p:cNvPr id="2" name="Slide Image Placeholder 1"/>
+          <p:cNvSpPr>
+            <a:spLocks noGrp="1" noRot="1" noChangeAspect="1"/>
+          </p:cNvSpPr>
+          <p:nvPr>
+            <p:ph type="sldImg"/>
+          </p:nvPr>
+        </p:nvSpPr>
+        <p:spPr/>
+      </p:sp>
+      <p:sp>
+        <p:nvSpPr>
+          <p:cNvPr id="3" name="Notes Placeholder 2"/>
+          <p:cNvSpPr>
+            <a:spLocks noGrp="1"/>
+          </p:cNvSpPr>
+          <p:nvPr>
+            <p:ph type="body" idx="1"/>
+          </p:nvPr>
+        </p:nvSpPr>
+        <p:spPr/>
+        <p:txBody>
+          <a:bodyPr/>
+          <a:lstStyle/>
+          <a:p>
+            <a:r>
+              <a:rPr lang="en-US" dirty="0"/>
+              <a:t>Notas: Verificar se a base de Color está alinhada ao UV — se saiu distorcida, conferir se o UV exportado é o mesmo usado na criação da textura.</a:t>
+            </a:r>
+            <a:endParaRPr lang="en-US" dirty="0"/>
+          </a:p>
+        </p:txBody>
+      </p:sp>
+      <p:sp>
+        <p:nvSpPr>
+          <p:cNvPr id="4" name="Slide Number Placeholder 3"/>
+          <p:cNvSpPr>
+            <a:spLocks noGrp="1"/>
+          </p:cNvSpPr>
+          <p:nvPr>
+            <p:ph type="sldNum" sz="quarter" idx="10"/>
+          </p:nvPr>
+        </p:nvSpPr>
+        <p:spPr/>
+        <p:txBody>
+          <a:bodyPr/>
+          <a:lstStyle/>
+          <a:p>
+            <a:fld id="{F7021451-1387-4CA6-816F-3879F97B5CBC}" type="slidenum">
+              <a:rPr lang="en-US"/>
+              <a:t>16</a:t>
+            </a:fld>
+            <a:endParaRPr lang="en-US"/>
+          </a:p>
+        </p:txBody>
+      </p:sp>
+    </p:spTree>
+    <p:extLst>
+      <p:ext uri="{BB962C8B-B14F-4D97-AF65-F5344CB8AC3E}">
+        <p14:creationId xmlns:p14="http://schemas.microsoft.com/office/powerpoint/2010/main" val="1024086991"/>
+      </p:ext>
+    </p:extLst>
+  </p:cSld>
+  <p:clrMapOvr>
+    <a:masterClrMapping/>
+  </p:clrMapOvr>
+</p:notes>
+</file>
+
+<file path=ppt/notesSlides/notesSlide17.xml><?xml version="1.0" encoding="utf-8"?>
+<p:notes xmlns:a="http://schemas.openxmlformats.org/drawingml/2006/main" xmlns:r="http://schemas.openxmlformats.org/officeDocument/2006/relationships" xmlns:p="http://schemas.openxmlformats.org/presentationml/2006/main">
+  <p:cSld>
+    <p:spTree>
+      <p:nvGrpSpPr>
+        <p:cNvPr id="1" name=""/>
+        <p:cNvGrpSpPr/>
+        <p:nvPr/>
+      </p:nvGrpSpPr>
+      <p:grpSpPr>
+        <a:xfrm>
+          <a:off x="0" y="0"/>
+          <a:ext cx="0" cy="0"/>
+          <a:chOff x="0" y="0"/>
+          <a:chExt cx="0" cy="0"/>
+        </a:xfrm>
+      </p:grpSpPr>
+      <p:sp>
+        <p:nvSpPr>
+          <p:cNvPr id="2" name="Slide Image Placeholder 1"/>
+          <p:cNvSpPr>
+            <a:spLocks noGrp="1" noRot="1" noChangeAspect="1"/>
+          </p:cNvSpPr>
+          <p:nvPr>
+            <p:ph type="sldImg"/>
+          </p:nvPr>
+        </p:nvSpPr>
+        <p:spPr/>
+      </p:sp>
+      <p:sp>
+        <p:nvSpPr>
+          <p:cNvPr id="3" name="Notes Placeholder 2"/>
+          <p:cNvSpPr>
+            <a:spLocks noGrp="1"/>
+          </p:cNvSpPr>
+          <p:nvPr>
+            <p:ph type="body" idx="1"/>
+          </p:nvPr>
+        </p:nvSpPr>
+        <p:spPr/>
+        <p:txBody>
+          <a:bodyPr/>
+          <a:lstStyle/>
+          <a:p>
+            <a:r>
+              <a:rPr lang="en-US" dirty="0"/>
+              <a:t>Notas: Erro comum: aplicar o AO direto no canal Color, apagando a textura de base. Reforçar modo de mistura Multiply/Overlay com opacidade controlada.</a:t>
+            </a:r>
+            <a:endParaRPr lang="en-US" dirty="0"/>
+          </a:p>
+        </p:txBody>
+      </p:sp>
+      <p:sp>
+        <p:nvSpPr>
+          <p:cNvPr id="4" name="Slide Number Placeholder 3"/>
+          <p:cNvSpPr>
+            <a:spLocks noGrp="1"/>
+          </p:cNvSpPr>
+          <p:nvPr>
+            <p:ph type="sldNum" sz="quarter" idx="10"/>
+          </p:nvPr>
+        </p:nvSpPr>
+        <p:spPr/>
+        <p:txBody>
+          <a:bodyPr/>
+          <a:lstStyle/>
+          <a:p>
+            <a:fld id="{F7021451-1387-4CA6-816F-3879F97B5CBC}" type="slidenum">
+              <a:rPr lang="en-US"/>
+              <a:t>17</a:t>
+            </a:fld>
+            <a:endParaRPr lang="en-US"/>
+          </a:p>
+        </p:txBody>
+      </p:sp>
+    </p:spTree>
+    <p:extLst>
+      <p:ext uri="{BB962C8B-B14F-4D97-AF65-F5344CB8AC3E}">
+        <p14:creationId xmlns:p14="http://schemas.microsoft.com/office/powerpoint/2010/main" val="1024086991"/>
+      </p:ext>
+    </p:extLst>
+  </p:cSld>
+  <p:clrMapOvr>
+    <a:masterClrMapping/>
+  </p:clrMapOvr>
+</p:notes>
+</file>
+
+<file path=ppt/notesSlides/notesSlide18.xml><?xml version="1.0" encoding="utf-8"?>
+<p:notes xmlns:a="http://schemas.openxmlformats.org/drawingml/2006/main" xmlns:r="http://schemas.openxmlformats.org/officeDocument/2006/relationships" xmlns:p="http://schemas.openxmlformats.org/presentationml/2006/main">
+  <p:cSld>
+    <p:spTree>
+      <p:nvGrpSpPr>
+        <p:cNvPr id="1" name=""/>
+        <p:cNvGrpSpPr/>
+        <p:nvPr/>
+      </p:nvGrpSpPr>
+      <p:grpSpPr>
+        <a:xfrm>
+          <a:off x="0" y="0"/>
+          <a:ext cx="0" cy="0"/>
+          <a:chOff x="0" y="0"/>
+          <a:chExt cx="0" cy="0"/>
+        </a:xfrm>
+      </p:grpSpPr>
+      <p:sp>
+        <p:nvSpPr>
+          <p:cNvPr id="2" name="Slide Image Placeholder 1"/>
+          <p:cNvSpPr>
+            <a:spLocks noGrp="1" noRot="1" noChangeAspect="1"/>
+          </p:cNvSpPr>
+          <p:nvPr>
+            <p:ph type="sldImg"/>
+          </p:nvPr>
+        </p:nvSpPr>
+        <p:spPr/>
+      </p:sp>
+      <p:sp>
+        <p:nvSpPr>
+          <p:cNvPr id="3" name="Notes Placeholder 2"/>
+          <p:cNvSpPr>
+            <a:spLocks noGrp="1"/>
+          </p:cNvSpPr>
+          <p:nvPr>
+            <p:ph type="body" idx="1"/>
+          </p:nvPr>
+        </p:nvSpPr>
+        <p:spPr/>
+        <p:txBody>
+          <a:bodyPr/>
+          <a:lstStyle/>
+          <a:p>
+            <a:r>
+              <a:rPr lang="en-US" dirty="0"/>
+              <a:t>Notas: Meta do estúdio de hoje: pelo menos três canais ativos (Color, Roughness, Normal). Perguntar: "essas marcas de profundidade contam uma história? Onde esse objeto seria mais golpeado no universo do kit?"</a:t>
+            </a:r>
+            <a:endParaRPr lang="en-US" dirty="0"/>
+          </a:p>
+        </p:txBody>
+      </p:sp>
+      <p:sp>
+        <p:nvSpPr>
+          <p:cNvPr id="4" name="Slide Number Placeholder 3"/>
+          <p:cNvSpPr>
+            <a:spLocks noGrp="1"/>
+          </p:cNvSpPr>
+          <p:nvPr>
+            <p:ph type="sldNum" sz="quarter" idx="10"/>
+          </p:nvPr>
+        </p:nvSpPr>
+        <p:spPr/>
+        <p:txBody>
+          <a:bodyPr/>
+          <a:lstStyle/>
+          <a:p>
+            <a:fld id="{F7021451-1387-4CA6-816F-3879F97B5CBC}" type="slidenum">
+              <a:rPr lang="en-US"/>
+              <a:t>18</a:t>
+            </a:fld>
+            <a:endParaRPr lang="en-US"/>
+          </a:p>
+        </p:txBody>
+      </p:sp>
+    </p:spTree>
+    <p:extLst>
+      <p:ext uri="{BB962C8B-B14F-4D97-AF65-F5344CB8AC3E}">
+        <p14:creationId xmlns:p14="http://schemas.microsoft.com/office/powerpoint/2010/main" val="1024086991"/>
+      </p:ext>
+    </p:extLst>
+  </p:cSld>
+  <p:clrMapOvr>
+    <a:masterClrMapping/>
+  </p:clrMapOvr>
+</p:notes>
+</file>
+
+<file path=ppt/notesSlides/notesSlide19.xml><?xml version="1.0" encoding="utf-8"?>
+<p:notes xmlns:a="http://schemas.openxmlformats.org/drawingml/2006/main" xmlns:r="http://schemas.openxmlformats.org/officeDocument/2006/relationships" xmlns:p="http://schemas.openxmlformats.org/presentationml/2006/main">
+  <p:cSld>
+    <p:spTree>
+      <p:nvGrpSpPr>
+        <p:cNvPr id="1" name=""/>
+        <p:cNvGrpSpPr/>
+        <p:nvPr/>
+      </p:nvGrpSpPr>
+      <p:grpSpPr>
+        <a:xfrm>
+          <a:off x="0" y="0"/>
+          <a:ext cx="0" cy="0"/>
+          <a:chOff x="0" y="0"/>
+          <a:chExt cx="0" cy="0"/>
+        </a:xfrm>
+      </p:grpSpPr>
+      <p:sp>
+        <p:nvSpPr>
+          <p:cNvPr id="2" name="Slide Image Placeholder 1"/>
+          <p:cNvSpPr>
+            <a:spLocks noGrp="1" noRot="1" noChangeAspect="1"/>
+          </p:cNvSpPr>
+          <p:nvPr>
+            <p:ph type="sldImg"/>
+          </p:nvPr>
+        </p:nvSpPr>
+        <p:spPr/>
+      </p:sp>
+      <p:sp>
+        <p:nvSpPr>
+          <p:cNvPr id="3" name="Notes Placeholder 2"/>
+          <p:cNvSpPr>
+            <a:spLocks noGrp="1"/>
+          </p:cNvSpPr>
+          <p:nvPr>
+            <p:ph type="body" idx="1"/>
+          </p:nvPr>
+        </p:nvSpPr>
+        <p:spPr/>
+        <p:txBody>
+          <a:bodyPr/>
+          <a:lstStyle/>
+          <a:p>
+            <a:r>
+              <a:rPr lang="en-US" dirty="0"/>
+              <a:t>Notas: Abertura do Encontro 2. Fechar nomeando o erro mais comum (tipicamente opacidade excessiva da máscara, ou máscara não conectada ao modo de mistura correto) e o estado geral das duas trilhas.</a:t>
+            </a:r>
+            <a:endParaRPr lang="en-US" dirty="0"/>
+          </a:p>
+        </p:txBody>
+      </p:sp>
+      <p:sp>
+        <p:nvSpPr>
+          <p:cNvPr id="4" name="Slide Number Placeholder 3"/>
+          <p:cNvSpPr>
+            <a:spLocks noGrp="1"/>
+          </p:cNvSpPr>
+          <p:nvPr>
+            <p:ph type="sldNum" sz="quarter" idx="10"/>
+          </p:nvPr>
+        </p:nvSpPr>
+        <p:spPr/>
+        <p:txBody>
+          <a:bodyPr/>
+          <a:lstStyle/>
+          <a:p>
+            <a:fld id="{F7021451-1387-4CA6-816F-3879F97B5CBC}" type="slidenum">
+              <a:rPr lang="en-US"/>
+              <a:t>19</a:t>
+            </a:fld>
+            <a:endParaRPr lang="en-US"/>
+          </a:p>
+        </p:txBody>
+      </p:sp>
+    </p:spTree>
+    <p:extLst>
+      <p:ext uri="{BB962C8B-B14F-4D97-AF65-F5344CB8AC3E}">
+        <p14:creationId xmlns:p14="http://schemas.microsoft.com/office/powerpoint/2010/main" val="1024086991"/>
+      </p:ext>
+    </p:extLst>
+  </p:cSld>
+  <p:clrMapOvr>
+    <a:masterClrMapping/>
+  </p:clrMapOvr>
+</p:notes>
+</file>
+
 <file path=ppt/notesSlides/notesSlide2.xml><?xml version="1.0" encoding="utf-8"?>
 <p:notes xmlns:a="http://schemas.openxmlformats.org/drawingml/2006/main" xmlns:r="http://schemas.openxmlformats.org/officeDocument/2006/relationships" xmlns:p="http://schemas.openxmlformats.org/presentationml/2006/main">
   <p:cSld>
@@ -1137,7 +1496,7 @@
           <a:p>
             <a:r>
               <a:rPr lang="en-US" dirty="0"/>
-              <a:t>Notas: Ler rápido. Cada objetivo retorna ao longo da aula. Objetivo 9 do plano (situar o bake dentro do conceito de texturização procedural da Semana 1) fica para o slide de panorama mais adiante. SSS não é tratado hoje — Semana 8.</a:t>
+              <a:t>Notas: Recapitular em uma frase. Não reabrir o conteúdo técnico de seamless da Semana 6 — isso já foi ensinado. Só situar a transição de ferramenta.</a:t>
             </a:r>
             <a:endParaRPr lang="en-US" dirty="0"/>
           </a:p>
@@ -1179,6 +1538,270 @@
 </p:notes>
 </file>
 
+<file path=ppt/notesSlides/notesSlide20.xml><?xml version="1.0" encoding="utf-8"?>
+<p:notes xmlns:a="http://schemas.openxmlformats.org/drawingml/2006/main" xmlns:r="http://schemas.openxmlformats.org/officeDocument/2006/relationships" xmlns:p="http://schemas.openxmlformats.org/presentationml/2006/main">
+  <p:cSld>
+    <p:spTree>
+      <p:nvGrpSpPr>
+        <p:cNvPr id="1" name=""/>
+        <p:cNvGrpSpPr/>
+        <p:nvPr/>
+      </p:nvGrpSpPr>
+      <p:grpSpPr>
+        <a:xfrm>
+          <a:off x="0" y="0"/>
+          <a:ext cx="0" cy="0"/>
+          <a:chOff x="0" y="0"/>
+          <a:chExt cx="0" cy="0"/>
+        </a:xfrm>
+      </p:grpSpPr>
+      <p:sp>
+        <p:nvSpPr>
+          <p:cNvPr id="2" name="Slide Image Placeholder 1"/>
+          <p:cNvSpPr>
+            <a:spLocks noGrp="1" noRot="1" noChangeAspect="1"/>
+          </p:cNvSpPr>
+          <p:nvPr>
+            <p:ph type="sldImg"/>
+          </p:nvPr>
+        </p:nvSpPr>
+        <p:spPr/>
+      </p:sp>
+      <p:sp>
+        <p:nvSpPr>
+          <p:cNvPr id="3" name="Notes Placeholder 2"/>
+          <p:cNvSpPr>
+            <a:spLocks noGrp="1"/>
+          </p:cNvSpPr>
+          <p:nvPr>
+            <p:ph type="body" idx="1"/>
+          </p:nvPr>
+        </p:nvSpPr>
+        <p:spPr/>
+        <p:txBody>
+          <a:bodyPr/>
+          <a:lstStyle/>
+          <a:p>
+            <a:r>
+              <a:rPr lang="en-US" dirty="0"/>
+              <a:t>Notas: Prioridade de quem ainda não tem os três canais ativos. Quem já está satisfeito pode seguir direto para o aprofundamento.</a:t>
+            </a:r>
+            <a:endParaRPr lang="en-US" dirty="0"/>
+          </a:p>
+        </p:txBody>
+      </p:sp>
+      <p:sp>
+        <p:nvSpPr>
+          <p:cNvPr id="4" name="Slide Number Placeholder 3"/>
+          <p:cNvSpPr>
+            <a:spLocks noGrp="1"/>
+          </p:cNvSpPr>
+          <p:nvPr>
+            <p:ph type="sldNum" sz="quarter" idx="10"/>
+          </p:nvPr>
+        </p:nvSpPr>
+        <p:spPr/>
+        <p:txBody>
+          <a:bodyPr/>
+          <a:lstStyle/>
+          <a:p>
+            <a:fld id="{F7021451-1387-4CA6-816F-3879F97B5CBC}" type="slidenum">
+              <a:rPr lang="en-US"/>
+              <a:t>20</a:t>
+            </a:fld>
+            <a:endParaRPr lang="en-US"/>
+          </a:p>
+        </p:txBody>
+      </p:sp>
+    </p:spTree>
+    <p:extLst>
+      <p:ext uri="{BB962C8B-B14F-4D97-AF65-F5344CB8AC3E}">
+        <p14:creationId xmlns:p14="http://schemas.microsoft.com/office/powerpoint/2010/main" val="1024086991"/>
+      </p:ext>
+    </p:extLst>
+  </p:cSld>
+  <p:clrMapOvr>
+    <a:masterClrMapping/>
+  </p:clrMapOvr>
+</p:notes>
+</file>
+
+<file path=ppt/notesSlides/notesSlide21.xml><?xml version="1.0" encoding="utf-8"?>
+<p:notes xmlns:a="http://schemas.openxmlformats.org/drawingml/2006/main" xmlns:r="http://schemas.openxmlformats.org/officeDocument/2006/relationships" xmlns:p="http://schemas.openxmlformats.org/presentationml/2006/main">
+  <p:cSld>
+    <p:spTree>
+      <p:nvGrpSpPr>
+        <p:cNvPr id="1" name=""/>
+        <p:cNvGrpSpPr/>
+        <p:nvPr/>
+      </p:nvGrpSpPr>
+      <p:grpSpPr>
+        <a:xfrm>
+          <a:off x="0" y="0"/>
+          <a:ext cx="0" cy="0"/>
+          <a:chOff x="0" y="0"/>
+          <a:chExt cx="0" cy="0"/>
+        </a:xfrm>
+      </p:grpSpPr>
+      <p:sp>
+        <p:nvSpPr>
+          <p:cNvPr id="2" name="Slide Image Placeholder 1"/>
+          <p:cNvSpPr>
+            <a:spLocks noGrp="1" noRot="1" noChangeAspect="1"/>
+          </p:cNvSpPr>
+          <p:nvPr>
+            <p:ph type="sldImg"/>
+          </p:nvPr>
+        </p:nvSpPr>
+        <p:spPr/>
+      </p:sp>
+      <p:sp>
+        <p:nvSpPr>
+          <p:cNvPr id="3" name="Notes Placeholder 2"/>
+          <p:cNvSpPr>
+            <a:spLocks noGrp="1"/>
+          </p:cNvSpPr>
+          <p:nvPr>
+            <p:ph type="body" idx="1"/>
+          </p:nvPr>
+        </p:nvSpPr>
+        <p:spPr/>
+        <p:txBody>
+          <a:bodyPr/>
+          <a:lstStyle/>
+          <a:p>
+            <a:r>
+              <a:rPr lang="en-US" dirty="0"/>
+              <a:t>Notas: Para quem já tem os três canais fechados. Alternativa: comparar o bake do 3D Coat com a técnica de nós procedurais do Blender (Cap. 13) em uma segunda superfície.</a:t>
+            </a:r>
+            <a:endParaRPr lang="en-US" dirty="0"/>
+          </a:p>
+        </p:txBody>
+      </p:sp>
+      <p:sp>
+        <p:nvSpPr>
+          <p:cNvPr id="4" name="Slide Number Placeholder 3"/>
+          <p:cNvSpPr>
+            <a:spLocks noGrp="1"/>
+          </p:cNvSpPr>
+          <p:nvPr>
+            <p:ph type="sldNum" sz="quarter" idx="10"/>
+          </p:nvPr>
+        </p:nvSpPr>
+        <p:spPr/>
+        <p:txBody>
+          <a:bodyPr/>
+          <a:lstStyle/>
+          <a:p>
+            <a:fld id="{F7021451-1387-4CA6-816F-3879F97B5CBC}" type="slidenum">
+              <a:rPr lang="en-US"/>
+              <a:t>21</a:t>
+            </a:fld>
+            <a:endParaRPr lang="en-US"/>
+          </a:p>
+        </p:txBody>
+      </p:sp>
+    </p:spTree>
+    <p:extLst>
+      <p:ext uri="{BB962C8B-B14F-4D97-AF65-F5344CB8AC3E}">
+        <p14:creationId xmlns:p14="http://schemas.microsoft.com/office/powerpoint/2010/main" val="1024086991"/>
+      </p:ext>
+    </p:extLst>
+  </p:cSld>
+  <p:clrMapOvr>
+    <a:masterClrMapping/>
+  </p:clrMapOvr>
+</p:notes>
+</file>
+
+<file path=ppt/notesSlides/notesSlide22.xml><?xml version="1.0" encoding="utf-8"?>
+<p:notes xmlns:a="http://schemas.openxmlformats.org/drawingml/2006/main" xmlns:r="http://schemas.openxmlformats.org/officeDocument/2006/relationships" xmlns:p="http://schemas.openxmlformats.org/presentationml/2006/main">
+  <p:cSld>
+    <p:spTree>
+      <p:nvGrpSpPr>
+        <p:cNvPr id="1" name=""/>
+        <p:cNvGrpSpPr/>
+        <p:nvPr/>
+      </p:nvGrpSpPr>
+      <p:grpSpPr>
+        <a:xfrm>
+          <a:off x="0" y="0"/>
+          <a:ext cx="0" cy="0"/>
+          <a:chOff x="0" y="0"/>
+          <a:chExt cx="0" cy="0"/>
+        </a:xfrm>
+      </p:grpSpPr>
+      <p:sp>
+        <p:nvSpPr>
+          <p:cNvPr id="2" name="Slide Image Placeholder 1"/>
+          <p:cNvSpPr>
+            <a:spLocks noGrp="1" noRot="1" noChangeAspect="1"/>
+          </p:cNvSpPr>
+          <p:nvPr>
+            <p:ph type="sldImg"/>
+          </p:nvPr>
+        </p:nvSpPr>
+        <p:spPr/>
+      </p:sp>
+      <p:sp>
+        <p:nvSpPr>
+          <p:cNvPr id="3" name="Notes Placeholder 2"/>
+          <p:cNvSpPr>
+            <a:spLocks noGrp="1"/>
+          </p:cNvSpPr>
+          <p:nvPr>
+            <p:ph type="body" idx="1"/>
+          </p:nvPr>
+        </p:nvSpPr>
+        <p:spPr/>
+        <p:txBody>
+          <a:bodyPr/>
+          <a:lstStyle/>
+          <a:p>
+            <a:r>
+              <a:rPr lang="en-US" dirty="0"/>
+              <a:t>Notas: Fechamento (10 min): "Hoje vocês montaram um material PBR completo pela primeira vez dentro do 3D Coat — com profundidade vinda da própria malha e do pincel, não de nós matemáticos." Ponte: na Semana 8 o material é refinado e exportado com os quatro mapas PBR completos.</a:t>
+            </a:r>
+            <a:endParaRPr lang="en-US" dirty="0"/>
+          </a:p>
+        </p:txBody>
+      </p:sp>
+      <p:sp>
+        <p:nvSpPr>
+          <p:cNvPr id="4" name="Slide Number Placeholder 3"/>
+          <p:cNvSpPr>
+            <a:spLocks noGrp="1"/>
+          </p:cNvSpPr>
+          <p:nvPr>
+            <p:ph type="sldNum" sz="quarter" idx="10"/>
+          </p:nvPr>
+        </p:nvSpPr>
+        <p:spPr/>
+        <p:txBody>
+          <a:bodyPr/>
+          <a:lstStyle/>
+          <a:p>
+            <a:fld id="{F7021451-1387-4CA6-816F-3879F97B5CBC}" type="slidenum">
+              <a:rPr lang="en-US"/>
+              <a:t>22</a:t>
+            </a:fld>
+            <a:endParaRPr lang="en-US"/>
+          </a:p>
+        </p:txBody>
+      </p:sp>
+    </p:spTree>
+    <p:extLst>
+      <p:ext uri="{BB962C8B-B14F-4D97-AF65-F5344CB8AC3E}">
+        <p14:creationId xmlns:p14="http://schemas.microsoft.com/office/powerpoint/2010/main" val="1024086991"/>
+      </p:ext>
+    </p:extLst>
+  </p:cSld>
+  <p:clrMapOvr>
+    <a:masterClrMapping/>
+  </p:clrMapOvr>
+</p:notes>
+</file>
+
 <file path=ppt/notesSlides/notesSlide3.xml><?xml version="1.0" encoding="utf-8"?>
 <p:notes xmlns:a="http://schemas.openxmlformats.org/drawingml/2006/main" xmlns:r="http://schemas.openxmlformats.org/officeDocument/2006/relationships" xmlns:p="http://schemas.openxmlformats.org/presentationml/2006/main">
   <p:cSld>
@@ -1225,12 +1848,7 @@
           <a:p>
             <a:r>
               <a:rPr lang="en-US" dirty="0"/>
-              <a:t>Notas: Abrir com comparação visual no projetor (imagens estáticas), três versões do mesmo asset de parede de pedra: (1) só Albedo — Semana 6. (2) + Ambient Occlusion multiplicado sobre o Albedo — reentrâncias escurecem. (3) + Curvature como máscara — arestas recebem desgaste/brilho diferenciado. Conduzir a turma a perceber que a resposta é a própria geometria do asset: reentrâncias, bordas e bevels. Aguardar 2-3 respostas antes de revelar o conceito.
-[!FIGURA — produzir novo material, o conteúdo mudou de Blender-procedural para 3D Coat/mesh maps]
-Objetivo didático: provocar a turma a perceber que a profundidade nasce da geometria, não de pintura manual, ancorando o conceito de mesh map antes da definição.
-Arquivo sugerido: assets/parede_ao_curvature_tres_estagios.webp (não existe ainda — precisa ser produzido)
-Descrição: a mesma parede de pedra em três painéis lado a lado — (1) só Albedo, (2) + AO multiplicado, (3) + Curvature como máscara de desgaste nas arestas.
-Como produzir: no 3D Coat, importar o asset de demonstração com a textura seamless da Semana 6 no Color, capturar o Render Room sem máscara, gerar AO e capturar de novo, gerar Curvature e aplicar como máscara de desgaste e capturar uma terceira vez. Compor os três lado a lado no Krita com rótulos.</a:t>
+              <a:t>Notas: Os três primeiros objetivos são conceituais/mini aula; os demais são o trabalho prático de hoje no estúdio.</a:t>
             </a:r>
             <a:endParaRPr lang="en-US" dirty="0"/>
           </a:p>
@@ -1318,7 +1936,12 @@
           <a:p>
             <a:r>
               <a:rPr lang="en-US" dirty="0"/>
-              <a:t>Notas: Ponto central da mini aula. Ferramentas como 3D Coat e Substance Painter extraem essa informação direto da malha 3D. AO simula acúmulo natural de sombra/sujeira em reentrâncias. Curvature é o mapa mais útil para desgaste: bordas são onde a pintura descasca e o metal fica exposto — o oposto das reentrâncias.</a:t>
+              <a:t>Notas: Mostrar 3 versões da mesma parede: (1) só Albedo (resultado da Semana 6), (2) com AO multiplicado por cima, (3) com Curvature também aplicado como máscara. Perguntar de onde vem a informação — conduzir a turma a perceber que é a própria geometria (reentrâncias, bordas, bevels), não uma imagem externa.
+[!FIGURA]
+Objetivo didático — Evidenciar que AO e Curvature nascem da geometria, sem exigir high-poly nem pintura manual.
+Arquivo sugerido — assets/parede_ao_curvature_comparacao.webp
+Descrição — Três renders lado a lado da mesma parede de pedra: (1) só Albedo/textura seamless da Semana 6, (2) com mapa de AO multiplicado (reentrâncias mais escuras), (3) com Curvature também aplicado (arestas com desgaste/brilho diferenciado).
+Como produzir — Renderizar no 3D Coat (Render Room) o mesmo asset de demonstração em três estados de camada: só Color, Color+AO, Color+AO+Curvature.</a:t>
             </a:r>
             <a:endParaRPr lang="en-US" dirty="0"/>
           </a:p>
@@ -1406,7 +2029,7 @@
           <a:p>
             <a:r>
               <a:rPr lang="en-US" dirty="0"/>
-              <a:t>Notas: Diferença central em relação ao que a Semana 6 e a Apostila (Cap. 13) descrevem como via alternativa. O Normal Map desta semana nasce de pintura de profundidade, não de matemática de ruído. Preparar a turma para a Demonstração, onde isso é feito ao vivo.</a:t>
+              <a:t>Notas: Frestas/cantos internos = mais escuros no AO (é onde sujeira e sombra de contato se acumulam). Arestas/quinas = onde a pintura descasca e o metal fica exposto — o oposto do que acontece nas reentrâncias.</a:t>
             </a:r>
             <a:endParaRPr lang="en-US" dirty="0"/>
           </a:p>
@@ -1494,7 +2117,7 @@
           <a:p>
             <a:r>
               <a:rPr lang="en-US" dirty="0"/>
-              <a:t>Notas: Reforçar que não é um recomeço — é uma migração de ferramenta. O UV e o Albedo da Semana 6 seguem valendo; a diferença é o lugar onde o resto do material é construído. Isso tranquiliza estudantes que investiram tempo na textura seamless da semana passada.</a:t>
+              <a:t>Notas: Diferença central em relação ao workflow tradicional de produções AAA: lá o Normal nasce da diferença high-poly/low-poly. Aqui, sem high-poly, o Normal nasce de pintura de profundidade.</a:t>
             </a:r>
             <a:endParaRPr lang="en-US" dirty="0"/>
           </a:p>
@@ -1582,7 +2205,7 @@
           <a:p>
             <a:r>
               <a:rPr lang="en-US" dirty="0"/>
-              <a:t>Notas: Nos dois casos o resultado técnico é equivalente: Color + Roughness + Normal ativos, com máscaras de AO/Curvature orientando o desgaste. Quem baixou textura estilizada pronta na Semana 6 usa essa imagem como ponto de partida da camada de Color, igual à trilha fotorrealista usa a foto. Se a biblioteca de Smart Materials do laboratório for limitada, montar manualmente: camada de Color + variação com Brush + camada de desgaste mascarada por AO/Curvature — o conceito pedagógico é o mesmo.</a:t>
+              <a:t>Notas: Reforçar que não é um recomeço — é uma troca de ferramenta para a mesma tarefa de refinar o material.</a:t>
             </a:r>
             <a:endParaRPr lang="en-US" dirty="0"/>
           </a:p>
@@ -1670,7 +2293,7 @@
           <a:p>
             <a:r>
               <a:rPr lang="en-US" dirty="0"/>
-              <a:t>Notas: Orientação de interface, rápida. No workflow da disciplina os UVs já chegam prontos do Blender — o UV Room é checagem, não produção. Nomes exatos de painéis variam por versão do 3D Coat; verificar antes da aula.</a:t>
+              <a:t>Notas: Quem já baixou uma textura estilizada pronta na Semana 6 usa essa imagem como ponto de partida da camada de Color, do mesmo jeito que a trilha fotorrealista usa a foto.</a:t>
             </a:r>
             <a:endParaRPr lang="en-US" dirty="0"/>
           </a:p>
@@ -1758,11 +2381,7 @@
           <a:p>
             <a:r>
               <a:rPr lang="en-US" dirty="0"/>
-              <a:t>Notas: Roteiro da Demonstração (20 min) e também da Produção em Estúdio. Passo 1: File → Export → FBX, preferir FBX com mais de um objeto. Passo 2: File → Import for Per-Pixel Painting, confirmar UV e resolução. Passo 4: painel de geração varia por versão — geralmente em Textures ou como Fill Layer com gerador procedural; alternativa manual se instável: pincel de opacidade baixa nas reentrâncias/arestas. Passo 6: canal Roughness recebe o mesmo tratamento por Curvature logo em seguida (arestas mais polidas).
-[!FIGURA — produzir novo material, o diagrama Noise/Bump/ColorRamp do deck anterior não se aplica mais]
-Objetivo didático: dar suporte visual ao roteiro de 6 passos da migração Blender → 3D Coat.
-Arquivo sugerido: assets/fluxo_migracao_3dcoat.png (não existe ainda — precisa ser produzido, por exemplo via o mesmo pipeline de mermaid → imagem já usado no deck da Semana 7 anterior)
-Descrição: fluxograma linear com os 6 passos acima, destacando que os passos 4 e 6 usam a mesma máscara de Curvature.</a:t>
+              <a:t>Notas: No workflow da disciplina os UVs já chegam prontos do Blender — o UV Room serve principalmente para conferência, não para editar UV do zero.</a:t>
             </a:r>
             <a:endParaRPr lang="en-US" dirty="0"/>
           </a:p>
@@ -2384,9 +3003,282 @@
 </p:sld>
 </file>
 
+<file path=ppt/slides/slide16.xml><?xml version="1.0" encoding="utf-8"?>
+<p:sld xmlns:a="http://schemas.openxmlformats.org/drawingml/2006/main" xmlns:r="http://schemas.openxmlformats.org/officeDocument/2006/relationships" xmlns:p="http://schemas.openxmlformats.org/presentationml/2006/main">
+  <p:cSld name="Slide 16">
+    <p:bg>
+      <p:bgPr>
+        <a:blipFill dpi="0" rotWithShape="1">
+          <a:blip r:embed="rId1">
+            <a:lum/>
+          </a:blip>
+          <a:srcRect/>
+          <a:stretch>
+            <a:fillRect/>
+          </a:stretch>
+        </a:blipFill>
+        <a:effectLst/>
+      </p:bgPr>
+    </p:bg>
+    <p:spTree>
+      <p:nvGrpSpPr>
+        <p:cNvPr id="1" name=""/>
+        <p:cNvGrpSpPr/>
+        <p:nvPr/>
+      </p:nvGrpSpPr>
+      <p:grpSpPr>
+        <a:xfrm>
+          <a:off x="0" y="0"/>
+          <a:ext cx="0" cy="0"/>
+          <a:chOff x="0" y="0"/>
+          <a:chExt cx="0" cy="0"/>
+        </a:xfrm>
+      </p:grpSpPr>
+    </p:spTree>
+  </p:cSld>
+  <p:clrMapOvr>
+    <a:masterClrMapping/>
+  </p:clrMapOvr>
+</p:sld>
+</file>
+
+<file path=ppt/slides/slide17.xml><?xml version="1.0" encoding="utf-8"?>
+<p:sld xmlns:a="http://schemas.openxmlformats.org/drawingml/2006/main" xmlns:r="http://schemas.openxmlformats.org/officeDocument/2006/relationships" xmlns:p="http://schemas.openxmlformats.org/presentationml/2006/main">
+  <p:cSld name="Slide 17">
+    <p:bg>
+      <p:bgPr>
+        <a:blipFill dpi="0" rotWithShape="1">
+          <a:blip r:embed="rId1">
+            <a:lum/>
+          </a:blip>
+          <a:srcRect/>
+          <a:stretch>
+            <a:fillRect/>
+          </a:stretch>
+        </a:blipFill>
+        <a:effectLst/>
+      </p:bgPr>
+    </p:bg>
+    <p:spTree>
+      <p:nvGrpSpPr>
+        <p:cNvPr id="1" name=""/>
+        <p:cNvGrpSpPr/>
+        <p:nvPr/>
+      </p:nvGrpSpPr>
+      <p:grpSpPr>
+        <a:xfrm>
+          <a:off x="0" y="0"/>
+          <a:ext cx="0" cy="0"/>
+          <a:chOff x="0" y="0"/>
+          <a:chExt cx="0" cy="0"/>
+        </a:xfrm>
+      </p:grpSpPr>
+    </p:spTree>
+  </p:cSld>
+  <p:clrMapOvr>
+    <a:masterClrMapping/>
+  </p:clrMapOvr>
+</p:sld>
+</file>
+
+<file path=ppt/slides/slide18.xml><?xml version="1.0" encoding="utf-8"?>
+<p:sld xmlns:a="http://schemas.openxmlformats.org/drawingml/2006/main" xmlns:r="http://schemas.openxmlformats.org/officeDocument/2006/relationships" xmlns:p="http://schemas.openxmlformats.org/presentationml/2006/main">
+  <p:cSld name="Slide 18">
+    <p:bg>
+      <p:bgPr>
+        <a:blipFill dpi="0" rotWithShape="1">
+          <a:blip r:embed="rId1">
+            <a:lum/>
+          </a:blip>
+          <a:srcRect/>
+          <a:stretch>
+            <a:fillRect/>
+          </a:stretch>
+        </a:blipFill>
+        <a:effectLst/>
+      </p:bgPr>
+    </p:bg>
+    <p:spTree>
+      <p:nvGrpSpPr>
+        <p:cNvPr id="1" name=""/>
+        <p:cNvGrpSpPr/>
+        <p:nvPr/>
+      </p:nvGrpSpPr>
+      <p:grpSpPr>
+        <a:xfrm>
+          <a:off x="0" y="0"/>
+          <a:ext cx="0" cy="0"/>
+          <a:chOff x="0" y="0"/>
+          <a:chExt cx="0" cy="0"/>
+        </a:xfrm>
+      </p:grpSpPr>
+    </p:spTree>
+  </p:cSld>
+  <p:clrMapOvr>
+    <a:masterClrMapping/>
+  </p:clrMapOvr>
+</p:sld>
+</file>
+
+<file path=ppt/slides/slide19.xml><?xml version="1.0" encoding="utf-8"?>
+<p:sld xmlns:a="http://schemas.openxmlformats.org/drawingml/2006/main" xmlns:r="http://schemas.openxmlformats.org/officeDocument/2006/relationships" xmlns:p="http://schemas.openxmlformats.org/presentationml/2006/main">
+  <p:cSld name="Slide 19">
+    <p:bg>
+      <p:bgPr>
+        <a:blipFill dpi="0" rotWithShape="1">
+          <a:blip r:embed="rId1">
+            <a:lum/>
+          </a:blip>
+          <a:srcRect/>
+          <a:stretch>
+            <a:fillRect/>
+          </a:stretch>
+        </a:blipFill>
+        <a:effectLst/>
+      </p:bgPr>
+    </p:bg>
+    <p:spTree>
+      <p:nvGrpSpPr>
+        <p:cNvPr id="1" name=""/>
+        <p:cNvGrpSpPr/>
+        <p:nvPr/>
+      </p:nvGrpSpPr>
+      <p:grpSpPr>
+        <a:xfrm>
+          <a:off x="0" y="0"/>
+          <a:ext cx="0" cy="0"/>
+          <a:chOff x="0" y="0"/>
+          <a:chExt cx="0" cy="0"/>
+        </a:xfrm>
+      </p:grpSpPr>
+    </p:spTree>
+  </p:cSld>
+  <p:clrMapOvr>
+    <a:masterClrMapping/>
+  </p:clrMapOvr>
+</p:sld>
+</file>
+
 <file path=ppt/slides/slide2.xml><?xml version="1.0" encoding="utf-8"?>
 <p:sld xmlns:a="http://schemas.openxmlformats.org/drawingml/2006/main" xmlns:r="http://schemas.openxmlformats.org/officeDocument/2006/relationships" xmlns:p="http://schemas.openxmlformats.org/presentationml/2006/main">
   <p:cSld name="Slide 2">
+    <p:bg>
+      <p:bgPr>
+        <a:blipFill dpi="0" rotWithShape="1">
+          <a:blip r:embed="rId1">
+            <a:lum/>
+          </a:blip>
+          <a:srcRect/>
+          <a:stretch>
+            <a:fillRect/>
+          </a:stretch>
+        </a:blipFill>
+        <a:effectLst/>
+      </p:bgPr>
+    </p:bg>
+    <p:spTree>
+      <p:nvGrpSpPr>
+        <p:cNvPr id="1" name=""/>
+        <p:cNvGrpSpPr/>
+        <p:nvPr/>
+      </p:nvGrpSpPr>
+      <p:grpSpPr>
+        <a:xfrm>
+          <a:off x="0" y="0"/>
+          <a:ext cx="0" cy="0"/>
+          <a:chOff x="0" y="0"/>
+          <a:chExt cx="0" cy="0"/>
+        </a:xfrm>
+      </p:grpSpPr>
+    </p:spTree>
+  </p:cSld>
+  <p:clrMapOvr>
+    <a:masterClrMapping/>
+  </p:clrMapOvr>
+</p:sld>
+</file>
+
+<file path=ppt/slides/slide20.xml><?xml version="1.0" encoding="utf-8"?>
+<p:sld xmlns:a="http://schemas.openxmlformats.org/drawingml/2006/main" xmlns:r="http://schemas.openxmlformats.org/officeDocument/2006/relationships" xmlns:p="http://schemas.openxmlformats.org/presentationml/2006/main">
+  <p:cSld name="Slide 20">
+    <p:bg>
+      <p:bgPr>
+        <a:blipFill dpi="0" rotWithShape="1">
+          <a:blip r:embed="rId1">
+            <a:lum/>
+          </a:blip>
+          <a:srcRect/>
+          <a:stretch>
+            <a:fillRect/>
+          </a:stretch>
+        </a:blipFill>
+        <a:effectLst/>
+      </p:bgPr>
+    </p:bg>
+    <p:spTree>
+      <p:nvGrpSpPr>
+        <p:cNvPr id="1" name=""/>
+        <p:cNvGrpSpPr/>
+        <p:nvPr/>
+      </p:nvGrpSpPr>
+      <p:grpSpPr>
+        <a:xfrm>
+          <a:off x="0" y="0"/>
+          <a:ext cx="0" cy="0"/>
+          <a:chOff x="0" y="0"/>
+          <a:chExt cx="0" cy="0"/>
+        </a:xfrm>
+      </p:grpSpPr>
+    </p:spTree>
+  </p:cSld>
+  <p:clrMapOvr>
+    <a:masterClrMapping/>
+  </p:clrMapOvr>
+</p:sld>
+</file>
+
+<file path=ppt/slides/slide21.xml><?xml version="1.0" encoding="utf-8"?>
+<p:sld xmlns:a="http://schemas.openxmlformats.org/drawingml/2006/main" xmlns:r="http://schemas.openxmlformats.org/officeDocument/2006/relationships" xmlns:p="http://schemas.openxmlformats.org/presentationml/2006/main">
+  <p:cSld name="Slide 21">
+    <p:bg>
+      <p:bgPr>
+        <a:blipFill dpi="0" rotWithShape="1">
+          <a:blip r:embed="rId1">
+            <a:lum/>
+          </a:blip>
+          <a:srcRect/>
+          <a:stretch>
+            <a:fillRect/>
+          </a:stretch>
+        </a:blipFill>
+        <a:effectLst/>
+      </p:bgPr>
+    </p:bg>
+    <p:spTree>
+      <p:nvGrpSpPr>
+        <p:cNvPr id="1" name=""/>
+        <p:cNvGrpSpPr/>
+        <p:nvPr/>
+      </p:nvGrpSpPr>
+      <p:grpSpPr>
+        <a:xfrm>
+          <a:off x="0" y="0"/>
+          <a:ext cx="0" cy="0"/>
+          <a:chOff x="0" y="0"/>
+          <a:chExt cx="0" cy="0"/>
+        </a:xfrm>
+      </p:grpSpPr>
+    </p:spTree>
+  </p:cSld>
+  <p:clrMapOvr>
+    <a:masterClrMapping/>
+  </p:clrMapOvr>
+</p:sld>
+</file>
+
+<file path=ppt/slides/slide22.xml><?xml version="1.0" encoding="utf-8"?>
+<p:sld xmlns:a="http://schemas.openxmlformats.org/drawingml/2006/main" xmlns:r="http://schemas.openxmlformats.org/officeDocument/2006/relationships" xmlns:p="http://schemas.openxmlformats.org/presentationml/2006/main">
+  <p:cSld name="Slide 22">
     <p:bg>
       <p:bgPr>
         <a:blipFill dpi="0" rotWithShape="1">

--- a/Slides/Semana 7/semana_7_slides.pptx
+++ b/Slides/Semana 7/semana_7_slides.pptx
@@ -523,7 +523,7 @@
           <a:p>
             <a:r>
               <a:rPr lang="en-US" dirty="0"/>
-              <a:t>Notas: Marcar a virada de ferramenta: o Blender deixa de montar o material e passa a só exportar a malha e receber os mapas de volta. O 3D Coat entra como ferramenta dedicada — e as duas trilhas visuais passam a usar o mesmo fluxo de ferramenta a partir de hoje. Sem crítica formal — a CF2 é na Semana 8.</a:t>
+              <a:t>Notas: Marcar a virada de ferramenta: o Blender deixa de montar o material e passa a só exportar a malha e receber os mapas de volta. O 3DCoatTextura entra como ferramenta dedicada — e as duas trilhas visuais passam a usar o mesmo fluxo de ferramenta a partir de hoje. Sem crítica formal — a CF2 é na Semana 8.</a:t>
             </a:r>
             <a:endParaRPr lang="en-US" dirty="0"/>
           </a:p>
@@ -877,10 +877,10 @@
               <a:rPr lang="en-US" dirty="0"/>
               <a:t>Notas: Transição para os 20 min de demonstração. Passo a passo: (1) exportar FBX com UV, (2) importar Per-Pixel Painting / Metalness PBR / 1024×1024, (3) camada de Color com a textura da Semana 6, (4) bake de AO e Curvature + camada de desgaste em modo Multiply, (5) Normal via pincel de Depth (rachadura, entalhe), (6) Roughness com Fill base + camada guiada por Curvature.
 [!FIGURA]
-Objetivo didático — Mostrar a sequência do fluxo de migração Blender → 3D Coat até o material com três canais ativos.
+Objetivo didático — Mostrar a sequência do fluxo de migração Blender → 3DCoatTextura até o material com três canais ativos.
 Arquivo sugerido — assets/demo_3dcoat_bake_workflow.webp
-Descrição — Sequência de 4 capturas de tela do 3D Coat lado a lado: malha recém-importada sem textura, com camada de Color aplicada, com AO/Curvature bakeados e aplicados como máscara de desgaste, e com as primeiras marcas de Normal pintadas no Depth.
-Como produzir — Capturar no 3D Coat usando o asset de demonstração do professor (parede simples com textura seamless da Semana 6), salvando cada etapa do Paint Room.</a:t>
+Descrição — Sequência de 4 capturas de tela do 3DCoatTextura lado a lado: malha recém-importada sem textura, com camada de Color aplicada, com AO/Curvature bakeados e aplicados como máscara de desgaste, e com as primeiras marcas de Normal pintadas no Depth.
+Como produzir — Capturar no 3DCoatTextura usando o asset de demonstração do professor (parede simples com textura seamless da Semana 6), salvando cada etapa do Paint Room.</a:t>
             </a:r>
             <a:endParaRPr lang="en-US" dirty="0"/>
           </a:p>
@@ -1056,7 +1056,7 @@
           <a:p>
             <a:r>
               <a:rPr lang="en-US" dirty="0"/>
-              <a:t>Notas: Encontro 1. Verificar se o UV importou corretamente no UV Room. Em computadores mais lentos, orientar para 512×512.</a:t>
+              <a:t>Notas: Encontro 1. Verificar se o UV importou corretamente na janela Texture Editor (Paint Room). Em computadores mais lentos, orientar para 512×512.</a:t>
             </a:r>
             <a:endParaRPr lang="en-US" dirty="0"/>
           </a:p>
@@ -1672,7 +1672,7 @@
           <a:p>
             <a:r>
               <a:rPr lang="en-US" dirty="0"/>
-              <a:t>Notas: Para quem já tem os três canais fechados. Alternativa: comparar o bake do 3D Coat com a técnica de nós procedurais do Blender (Cap. 13) em uma segunda superfície.</a:t>
+              <a:t>Notas: Para quem já tem os três canais fechados. Alternativa: comparar o bake do 3DCoatTextura com a técnica de nós procedurais do Blender (Cap. 13) em uma segunda superfície.</a:t>
             </a:r>
             <a:endParaRPr lang="en-US" dirty="0"/>
           </a:p>
@@ -1760,7 +1760,7 @@
           <a:p>
             <a:r>
               <a:rPr lang="en-US" dirty="0"/>
-              <a:t>Notas: Fechamento (10 min): "Hoje vocês montaram um material PBR completo pela primeira vez dentro do 3D Coat — com profundidade vinda da própria malha e do pincel, não de nós matemáticos." Ponte: na Semana 8 o material é refinado e exportado com os quatro mapas PBR completos.</a:t>
+              <a:t>Notas: Fechamento (10 min): "Hoje vocês montaram um material PBR completo pela primeira vez dentro do 3DCoatTextura — com profundidade vinda da própria malha e do pincel, não de nós matemáticos." Ponte: na Semana 8 o material é refinado e exportado com os quatro mapas PBR completos.</a:t>
             </a:r>
             <a:endParaRPr lang="en-US" dirty="0"/>
           </a:p>
@@ -1941,7 +1941,7 @@
 Objetivo didático — Evidenciar que AO e Curvature nascem da geometria, sem exigir high-poly nem pintura manual.
 Arquivo sugerido — assets/parede_ao_curvature_comparacao.webp
 Descrição — Três renders lado a lado da mesma parede de pedra: (1) só Albedo/textura seamless da Semana 6, (2) com mapa de AO multiplicado (reentrâncias mais escuras), (3) com Curvature também aplicado (arestas com desgaste/brilho diferenciado).
-Como produzir — Renderizar no 3D Coat (Render Room) o mesmo asset de demonstração em três estados de camada: só Color, Color+AO, Color+AO+Curvature.</a:t>
+Como produzir — Renderizar no 3DCoatTextura (Render Room) o mesmo asset de demonstração em três estados de camada: só Color, Color+AO, Color+AO+Curvature.</a:t>
             </a:r>
             <a:endParaRPr lang="en-US" dirty="0"/>
           </a:p>
@@ -2381,7 +2381,7 @@
           <a:p>
             <a:r>
               <a:rPr lang="en-US" dirty="0"/>
-              <a:t>Notas: No workflow da disciplina os UVs já chegam prontos do Blender — o UV Room serve principalmente para conferência, não para editar UV do zero.</a:t>
+              <a:t>Notas: O 3DCoatTextura é a edição do 3DCoat dedicada só à texturização — não tem as salas de escultura, retopologia e modelagem. No workflow da disciplina os UVs já chegam prontos do Blender: a conferência é feita na janela Texture Editor, dentro do Paint Room. Se o UV precisar de correção, corrige-se no Blender e reexporta-se.</a:t>
             </a:r>
             <a:endParaRPr lang="en-US" dirty="0"/>
           </a:p>

--- a/Slides/Semana 7/semana_7_slides.pptx
+++ b/Slides/Semana 7/semana_7_slides.pptx
@@ -27,9 +27,14 @@
     <p:sldId id="275" r:id="rId21"/>
     <p:sldId id="276" r:id="rId22"/>
     <p:sldId id="277" r:id="rId23"/>
+    <p:sldId id="278" r:id="rId24"/>
+    <p:sldId id="279" r:id="rId25"/>
+    <p:sldId id="280" r:id="rId26"/>
+    <p:sldId id="281" r:id="rId27"/>
+    <p:sldId id="282" r:id="rId28"/>
   </p:sldIdLst>
   <p:notesMasterIdLst>
-    <p:notesMasterId r:id="rId24"/>
+    <p:notesMasterId r:id="rId29"/>
   </p:notesMasterIdLst>
   <p:sldSz cx="12192000" cy="6858000"/>
   <p:notesSz cx="6858000" cy="12192000"/>
@@ -611,7 +616,12 @@
           <a:p>
             <a:r>
               <a:rPr lang="en-US" dirty="0"/>
-              <a:t>Notas: Panorama de 3 min, não é conteúdo obrigatório. Nota: o Subsurface Scattering (SSS) não entra hoje — é apresentado na Semana 8, para não sobrecarregar esta mini aula.</a:t>
+              <a:t>Notas: Resposta: NÃO — o Array não foi aplicado. Se exportar com "Apply Modifiers" desligado, chega só 1 dos 3 caixotes; se aplicar, as cópias compartilham o mesmo UV (volta ao cenário 3). Correção: aplicar o modificador (ou marcar Apply Modifiers) e conferir o UV depois. Cenário 8. Fechar o bloco apontando a página "Cenários de Exportação Blender → 3DCoatTextura" no menu Recursos do site.
+[!FIGURA]
+Objetivo didático — Reconhecer modificador não aplicado.
+Arquivo sugerido — assets/quiz_k5_modificador.webp
+Descrição — Print do Blender com o K5_Modificador: viewport mostrando 3 caixotes e painel de modificadores com o Array (Count 3) ainda não aplicado.
+Como produzir — Capturar o K5 do kit no Blender com o painel de modificadores aberto.</a:t>
             </a:r>
             <a:endParaRPr lang="en-US" dirty="0"/>
           </a:p>
@@ -699,7 +709,7 @@
           <a:p>
             <a:r>
               <a:rPr lang="en-US" dirty="0"/>
-              <a:t>Notas: Amarrar a C4 (Materiais PBR) e C5 (Texturização), observados hoje e avaliados formalmente na CF2 (Semana 8).</a:t>
+              <a:t>Notas: Este slide fica projetado durante todo o estúdio. Os 10 cenários completos estão na página "Cenários de Exportação Blender → 3DCoatTextura" (menu Recursos).</a:t>
             </a:r>
             <a:endParaRPr lang="en-US" dirty="0"/>
           </a:p>
@@ -787,7 +797,7 @@
           <a:p>
             <a:r>
               <a:rPr lang="en-US" dirty="0"/>
-              <a:t>Notas: Fechar a mini aula amarrando os conceitos antes da demonstração.</a:t>
+              <a:t>Notas: Bloco 5 (5 min para este slide e os dois seguintes). Frestas/cantos internos = mais escuros no AO (é onde sujeira e sombra de contato se acumulam). Arestas/quinas = onde a pintura descasca e o metal fica exposto — o oposto do que acontece nas reentrâncias. Responder agora a pergunta da abertura: a profundidade veio da geometria.</a:t>
             </a:r>
             <a:endParaRPr lang="en-US" dirty="0"/>
           </a:p>
@@ -875,12 +885,7 @@
           <a:p>
             <a:r>
               <a:rPr lang="en-US" dirty="0"/>
-              <a:t>Notas: Transição para os 20 min de demonstração. Passo a passo: (1) exportar FBX com UV, (2) importar Per-Pixel Painting / Metalness PBR / 1024×1024, (3) camada de Color com a textura da Semana 6, (4) bake de AO e Curvature + camada de desgaste em modo Multiply, (5) Normal via pincel de Depth (rachadura, entalhe), (6) Roughness com Fill base + camada guiada por Curvature.
-[!FIGURA]
-Objetivo didático — Mostrar a sequência do fluxo de migração Blender → 3DCoatTextura até o material com três canais ativos.
-Arquivo sugerido — assets/demo_3dcoat_bake_workflow.webp
-Descrição — Sequência de 4 capturas de tela do 3DCoatTextura lado a lado: malha recém-importada sem textura, com camada de Color aplicada, com AO/Curvature bakeados e aplicados como máscara de desgaste, e com as primeiras marcas de Normal pintadas no Depth.
-Como produzir — Capturar no 3DCoatTextura usando o asset de demonstração do professor (parede simples com textura seamless da Semana 6), salvando cada etapa do Paint Room.</a:t>
+              <a:t>Notas: Diferença central em relação ao workflow tradicional de produções AAA: lá o Normal nasce da diferença high-poly/low-poly. Aqui, sem high-poly, o Normal nasce de pintura de profundidade. O Albedo da Semana 6 continua sendo a base de cor — o que muda é que Roughness, Normal e desgaste viram camadas e máscaras no 3DCoatTextura.</a:t>
             </a:r>
             <a:endParaRPr lang="en-US" dirty="0"/>
           </a:p>
@@ -968,7 +973,7 @@
           <a:p>
             <a:r>
               <a:rPr lang="en-US" dirty="0"/>
-              <a:t>Notas: Divisória entre a mini aula e o estúdio. Os slides a seguir ficam projetados durante a produção — servem de consigna e timebox visíveis, apresentados um a um conforme a etapa correspondente começa.</a:t>
+              <a:t>Notas: Quem já baixou uma textura estilizada pronta na Semana 6 usa essa imagem como ponto de partida da camada de Color, do mesmo jeito que a trilha fotorrealista usa a foto. Via alternativa (nós procedurais no Blender, Apostila Cap. 13): só mencionar como leitura complementar, não avaliada — não há tempo para o panorama nesta mini aula.</a:t>
             </a:r>
             <a:endParaRPr lang="en-US" dirty="0"/>
           </a:p>
@@ -1056,7 +1061,7 @@
           <a:p>
             <a:r>
               <a:rPr lang="en-US" dirty="0"/>
-              <a:t>Notas: Encontro 1. Verificar se o UV importou corretamente na janela Texture Editor (Paint Room). Em computadores mais lentos, orientar para 512×512.</a:t>
+              <a:t>Notas: Fechar a mini aula amarrando os conceitos antes da demonstração. Hoje é observação — a CF2 avalia o material completo na Semana 8.</a:t>
             </a:r>
             <a:endParaRPr lang="en-US" dirty="0"/>
           </a:p>
@@ -1144,7 +1149,12 @@
           <a:p>
             <a:r>
               <a:rPr lang="en-US" dirty="0"/>
-              <a:t>Notas: Verificar se a base de Color está alinhada ao UV — se saiu distorcida, conferir se o UV exportado é o mesmo usado na criação da textura.</a:t>
+              <a:t>Notas: Transição para os 20 min de demonstração. Ter os arquivos de segurança (.3b de cada etapa) prontos na pasta [DEMO]_3DCoat_Exportacao/: se o 3DCoatTextura travar, abrir o da etapa seguinte e continuar. Passo a passo no plano de aula (Passos 1–6).
+[!FIGURA]
+Objetivo didático — Mostrar a sequência do fluxo de migração Blender → 3DCoatTextura até o material com três canais ativos.
+Arquivo sugerido — assets/demo_3dcoat_bake_workflow.webp
+Descrição — Sequência de 4 capturas de tela do 3DCoatTextura lado a lado: malha recém-importada sem textura, com camada de Color aplicada, com AO/Curvature aplicados como máscara de desgaste, e com as primeiras marcas de Normal pintadas no Depth.
+Como produzir — Capturar no 3DCoatTextura usando o asset de demonstração do professor (parede simples com textura seamless da Semana 6), salvando cada etapa do Paint Room.</a:t>
             </a:r>
             <a:endParaRPr lang="en-US" dirty="0"/>
           </a:p>
@@ -1232,7 +1242,7 @@
           <a:p>
             <a:r>
               <a:rPr lang="en-US" dirty="0"/>
-              <a:t>Notas: Erro comum: aplicar o AO direto no canal Color, apagando a textura de base. Reforçar modo de mistura Multiply/Overlay com opacidade controlada.</a:t>
+              <a:t>Notas: Mostrar de propósito, durante o Passo 4 da demonstração: prender o material com Attach → nada aparece → perguntar "por que não aconteceu nada?" → usar o Fill → o vermelho aparece só nas reentrâncias. Depois mudar o Degree, salvar, e mostrar que nada muda até limpar a camada e preencher de novo. É exatamente onde a turma vai travar no estúdio — ver na demonstração economiza atendimento. Pré-requisito: Edit → Calculate Occlusion / Calculate Curvature.</a:t>
             </a:r>
             <a:endParaRPr lang="en-US" dirty="0"/>
           </a:p>
@@ -1320,7 +1330,7 @@
           <a:p>
             <a:r>
               <a:rPr lang="en-US" dirty="0"/>
-              <a:t>Notas: Meta do estúdio de hoje: pelo menos três canais ativos (Color, Roughness, Normal). Perguntar: "essas marcas de profundidade contam uma história? Onde esse objeto seria mais golpeado no universo do kit?"</a:t>
+              <a:t>Notas: Divisória entre a mini aula e o estúdio. Os slides a seguir ficam projetados durante a produção — servem de consigna e timebox visíveis, apresentados um a um conforme a etapa correspondente começa. O slide do checklist pode ser reprojetado a qualquer momento.</a:t>
             </a:r>
             <a:endParaRPr lang="en-US" dirty="0"/>
           </a:p>
@@ -1408,7 +1418,7 @@
           <a:p>
             <a:r>
               <a:rPr lang="en-US" dirty="0"/>
-              <a:t>Notas: Abertura do Encontro 2. Fechar nomeando o erro mais comum (tipicamente opacidade excessiva da máscara, ou máscara não conectada ao modo de mistura correto) e o estado geral das duas trilhas.</a:t>
+              <a:t>Notas: Gabarito no roteiro do Kit de FBX com defeito (menu Recursos). Nos 2 últimos minutos, duas duplas contam sintoma → causa → correção. Quem recebe o K1 (controle, sem defeito) também tem uma resposta válida: "não há nada a corrigir" — e precisa justificar com o checklist.</a:t>
             </a:r>
             <a:endParaRPr lang="en-US" dirty="0"/>
           </a:p>
@@ -1584,7 +1594,7 @@
           <a:p>
             <a:r>
               <a:rPr lang="en-US" dirty="0"/>
-              <a:t>Notas: Prioridade de quem ainda não tem os três canais ativos. Quem já está satisfeito pode seguir direto para o aprofundamento.</a:t>
+              <a:t>Notas: Encontro 1. Em computadores mais lentos, orientar para 512×512. Se o UV estiver errado: voltar ao Blender — não tentar corrigir no 3DCoatTextura.</a:t>
             </a:r>
             <a:endParaRPr lang="en-US" dirty="0"/>
           </a:p>
@@ -1672,7 +1682,7 @@
           <a:p>
             <a:r>
               <a:rPr lang="en-US" dirty="0"/>
-              <a:t>Notas: Para quem já tem os três canais fechados. Alternativa: comparar o bake do 3DCoatTextura com a técnica de nós procedurais do Blender (Cap. 13) em uma segunda superfície.</a:t>
+              <a:t>Notas: Verificar se a base de Color está alinhada ao UV — se saiu distorcida, conferir se o UV exportado é o mesmo usado na criação da textura.</a:t>
             </a:r>
             <a:endParaRPr lang="en-US" dirty="0"/>
           </a:p>
@@ -1760,7 +1770,7 @@
           <a:p>
             <a:r>
               <a:rPr lang="en-US" dirty="0"/>
-              <a:t>Notas: Fechamento (10 min): "Hoje vocês montaram um material PBR completo pela primeira vez dentro do 3DCoatTextura — com profundidade vinda da própria malha e do pincel, não de nós matemáticos." Ponte: na Semana 8 o material é refinado e exportado com os quatro mapas PBR completos.</a:t>
+              <a:t>Notas: Erros comuns: aplicar o AO direto no canal Color, apagando a base; esquecer de ocultar a camada AmbientOcclusion gerada pelo cálculo (sombra em dobro); prender o material e não preencher. Sugerir o teste com vermelho puro.</a:t>
             </a:r>
             <a:endParaRPr lang="en-US" dirty="0"/>
           </a:p>
@@ -1802,6 +1812,446 @@
 </p:notes>
 </file>
 
+<file path=ppt/notesSlides/notesSlide23.xml><?xml version="1.0" encoding="utf-8"?>
+<p:notes xmlns:a="http://schemas.openxmlformats.org/drawingml/2006/main" xmlns:r="http://schemas.openxmlformats.org/officeDocument/2006/relationships" xmlns:p="http://schemas.openxmlformats.org/presentationml/2006/main">
+  <p:cSld>
+    <p:spTree>
+      <p:nvGrpSpPr>
+        <p:cNvPr id="1" name=""/>
+        <p:cNvGrpSpPr/>
+        <p:nvPr/>
+      </p:nvGrpSpPr>
+      <p:grpSpPr>
+        <a:xfrm>
+          <a:off x="0" y="0"/>
+          <a:ext cx="0" cy="0"/>
+          <a:chOff x="0" y="0"/>
+          <a:chExt cx="0" cy="0"/>
+        </a:xfrm>
+      </p:grpSpPr>
+      <p:sp>
+        <p:nvSpPr>
+          <p:cNvPr id="2" name="Slide Image Placeholder 1"/>
+          <p:cNvSpPr>
+            <a:spLocks noGrp="1" noRot="1" noChangeAspect="1"/>
+          </p:cNvSpPr>
+          <p:nvPr>
+            <p:ph type="sldImg"/>
+          </p:nvPr>
+        </p:nvSpPr>
+        <p:spPr/>
+      </p:sp>
+      <p:sp>
+        <p:nvSpPr>
+          <p:cNvPr id="3" name="Notes Placeholder 2"/>
+          <p:cNvSpPr>
+            <a:spLocks noGrp="1"/>
+          </p:cNvSpPr>
+          <p:nvPr>
+            <p:ph type="body" idx="1"/>
+          </p:nvPr>
+        </p:nvSpPr>
+        <p:spPr/>
+        <p:txBody>
+          <a:bodyPr/>
+          <a:lstStyle/>
+          <a:p>
+            <a:r>
+              <a:rPr lang="en-US" dirty="0"/>
+              <a:t>Notas: Meta do estúdio de hoje: pelo menos três canais ativos (Color, Roughness, Normal). Perguntar: "essas marcas de profundidade contam uma história? Onde esse objeto seria mais golpeado no universo do kit?"</a:t>
+            </a:r>
+            <a:endParaRPr lang="en-US" dirty="0"/>
+          </a:p>
+        </p:txBody>
+      </p:sp>
+      <p:sp>
+        <p:nvSpPr>
+          <p:cNvPr id="4" name="Slide Number Placeholder 3"/>
+          <p:cNvSpPr>
+            <a:spLocks noGrp="1"/>
+          </p:cNvSpPr>
+          <p:nvPr>
+            <p:ph type="sldNum" sz="quarter" idx="10"/>
+          </p:nvPr>
+        </p:nvSpPr>
+        <p:spPr/>
+        <p:txBody>
+          <a:bodyPr/>
+          <a:lstStyle/>
+          <a:p>
+            <a:fld id="{F7021451-1387-4CA6-816F-3879F97B5CBC}" type="slidenum">
+              <a:rPr lang="en-US"/>
+              <a:t>23</a:t>
+            </a:fld>
+            <a:endParaRPr lang="en-US"/>
+          </a:p>
+        </p:txBody>
+      </p:sp>
+    </p:spTree>
+    <p:extLst>
+      <p:ext uri="{BB962C8B-B14F-4D97-AF65-F5344CB8AC3E}">
+        <p14:creationId xmlns:p14="http://schemas.microsoft.com/office/powerpoint/2010/main" val="1024086991"/>
+      </p:ext>
+    </p:extLst>
+  </p:cSld>
+  <p:clrMapOvr>
+    <a:masterClrMapping/>
+  </p:clrMapOvr>
+</p:notes>
+</file>
+
+<file path=ppt/notesSlides/notesSlide24.xml><?xml version="1.0" encoding="utf-8"?>
+<p:notes xmlns:a="http://schemas.openxmlformats.org/drawingml/2006/main" xmlns:r="http://schemas.openxmlformats.org/officeDocument/2006/relationships" xmlns:p="http://schemas.openxmlformats.org/presentationml/2006/main">
+  <p:cSld>
+    <p:spTree>
+      <p:nvGrpSpPr>
+        <p:cNvPr id="1" name=""/>
+        <p:cNvGrpSpPr/>
+        <p:nvPr/>
+      </p:nvGrpSpPr>
+      <p:grpSpPr>
+        <a:xfrm>
+          <a:off x="0" y="0"/>
+          <a:ext cx="0" cy="0"/>
+          <a:chOff x="0" y="0"/>
+          <a:chExt cx="0" cy="0"/>
+        </a:xfrm>
+      </p:grpSpPr>
+      <p:sp>
+        <p:nvSpPr>
+          <p:cNvPr id="2" name="Slide Image Placeholder 1"/>
+          <p:cNvSpPr>
+            <a:spLocks noGrp="1" noRot="1" noChangeAspect="1"/>
+          </p:cNvSpPr>
+          <p:nvPr>
+            <p:ph type="sldImg"/>
+          </p:nvPr>
+        </p:nvSpPr>
+        <p:spPr/>
+      </p:sp>
+      <p:sp>
+        <p:nvSpPr>
+          <p:cNvPr id="3" name="Notes Placeholder 2"/>
+          <p:cNvSpPr>
+            <a:spLocks noGrp="1"/>
+          </p:cNvSpPr>
+          <p:nvPr>
+            <p:ph type="body" idx="1"/>
+          </p:nvPr>
+        </p:nvSpPr>
+        <p:spPr/>
+        <p:txBody>
+          <a:bodyPr/>
+          <a:lstStyle/>
+          <a:p>
+            <a:r>
+              <a:rPr lang="en-US" dirty="0"/>
+              <a:t>Notas: Abertura do Encontro 2. A discussão parte da comparação antes/depois, não da descrição. Fechar nomeando o erro mais comum (tipicamente opacidade excessiva da máscara, ou máscara não conectada ao modo de mistura correto) e o estado geral das duas trilhas.</a:t>
+            </a:r>
+            <a:endParaRPr lang="en-US" dirty="0"/>
+          </a:p>
+        </p:txBody>
+      </p:sp>
+      <p:sp>
+        <p:nvSpPr>
+          <p:cNvPr id="4" name="Slide Number Placeholder 3"/>
+          <p:cNvSpPr>
+            <a:spLocks noGrp="1"/>
+          </p:cNvSpPr>
+          <p:nvPr>
+            <p:ph type="sldNum" sz="quarter" idx="10"/>
+          </p:nvPr>
+        </p:nvSpPr>
+        <p:spPr/>
+        <p:txBody>
+          <a:bodyPr/>
+          <a:lstStyle/>
+          <a:p>
+            <a:fld id="{F7021451-1387-4CA6-816F-3879F97B5CBC}" type="slidenum">
+              <a:rPr lang="en-US"/>
+              <a:t>24</a:t>
+            </a:fld>
+            <a:endParaRPr lang="en-US"/>
+          </a:p>
+        </p:txBody>
+      </p:sp>
+    </p:spTree>
+    <p:extLst>
+      <p:ext uri="{BB962C8B-B14F-4D97-AF65-F5344CB8AC3E}">
+        <p14:creationId xmlns:p14="http://schemas.microsoft.com/office/powerpoint/2010/main" val="1024086991"/>
+      </p:ext>
+    </p:extLst>
+  </p:cSld>
+  <p:clrMapOvr>
+    <a:masterClrMapping/>
+  </p:clrMapOvr>
+</p:notes>
+</file>
+
+<file path=ppt/notesSlides/notesSlide25.xml><?xml version="1.0" encoding="utf-8"?>
+<p:notes xmlns:a="http://schemas.openxmlformats.org/drawingml/2006/main" xmlns:r="http://schemas.openxmlformats.org/officeDocument/2006/relationships" xmlns:p="http://schemas.openxmlformats.org/presentationml/2006/main">
+  <p:cSld>
+    <p:spTree>
+      <p:nvGrpSpPr>
+        <p:cNvPr id="1" name=""/>
+        <p:cNvGrpSpPr/>
+        <p:nvPr/>
+      </p:nvGrpSpPr>
+      <p:grpSpPr>
+        <a:xfrm>
+          <a:off x="0" y="0"/>
+          <a:ext cx="0" cy="0"/>
+          <a:chOff x="0" y="0"/>
+          <a:chExt cx="0" cy="0"/>
+        </a:xfrm>
+      </p:grpSpPr>
+      <p:sp>
+        <p:nvSpPr>
+          <p:cNvPr id="2" name="Slide Image Placeholder 1"/>
+          <p:cNvSpPr>
+            <a:spLocks noGrp="1" noRot="1" noChangeAspect="1"/>
+          </p:cNvSpPr>
+          <p:nvPr>
+            <p:ph type="sldImg"/>
+          </p:nvPr>
+        </p:nvSpPr>
+        <p:spPr/>
+      </p:sp>
+      <p:sp>
+        <p:nvSpPr>
+          <p:cNvPr id="3" name="Notes Placeholder 2"/>
+          <p:cNvSpPr>
+            <a:spLocks noGrp="1"/>
+          </p:cNvSpPr>
+          <p:nvPr>
+            <p:ph type="body" idx="1"/>
+          </p:nvPr>
+        </p:nvSpPr>
+        <p:spPr/>
+        <p:txBody>
+          <a:bodyPr/>
+          <a:lstStyle/>
+          <a:p>
+            <a:r>
+              <a:rPr lang="en-US" dirty="0"/>
+              <a:t>Notas: Prioridade de quem ainda não tem os três canais ativos. Quem já está satisfeito pode seguir direto para o aprofundamento.</a:t>
+            </a:r>
+            <a:endParaRPr lang="en-US" dirty="0"/>
+          </a:p>
+        </p:txBody>
+      </p:sp>
+      <p:sp>
+        <p:nvSpPr>
+          <p:cNvPr id="4" name="Slide Number Placeholder 3"/>
+          <p:cNvSpPr>
+            <a:spLocks noGrp="1"/>
+          </p:cNvSpPr>
+          <p:nvPr>
+            <p:ph type="sldNum" sz="quarter" idx="10"/>
+          </p:nvPr>
+        </p:nvSpPr>
+        <p:spPr/>
+        <p:txBody>
+          <a:bodyPr/>
+          <a:lstStyle/>
+          <a:p>
+            <a:fld id="{F7021451-1387-4CA6-816F-3879F97B5CBC}" type="slidenum">
+              <a:rPr lang="en-US"/>
+              <a:t>25</a:t>
+            </a:fld>
+            <a:endParaRPr lang="en-US"/>
+          </a:p>
+        </p:txBody>
+      </p:sp>
+    </p:spTree>
+    <p:extLst>
+      <p:ext uri="{BB962C8B-B14F-4D97-AF65-F5344CB8AC3E}">
+        <p14:creationId xmlns:p14="http://schemas.microsoft.com/office/powerpoint/2010/main" val="1024086991"/>
+      </p:ext>
+    </p:extLst>
+  </p:cSld>
+  <p:clrMapOvr>
+    <a:masterClrMapping/>
+  </p:clrMapOvr>
+</p:notes>
+</file>
+
+<file path=ppt/notesSlides/notesSlide26.xml><?xml version="1.0" encoding="utf-8"?>
+<p:notes xmlns:a="http://schemas.openxmlformats.org/drawingml/2006/main" xmlns:r="http://schemas.openxmlformats.org/officeDocument/2006/relationships" xmlns:p="http://schemas.openxmlformats.org/presentationml/2006/main">
+  <p:cSld>
+    <p:spTree>
+      <p:nvGrpSpPr>
+        <p:cNvPr id="1" name=""/>
+        <p:cNvGrpSpPr/>
+        <p:nvPr/>
+      </p:nvGrpSpPr>
+      <p:grpSpPr>
+        <a:xfrm>
+          <a:off x="0" y="0"/>
+          <a:ext cx="0" cy="0"/>
+          <a:chOff x="0" y="0"/>
+          <a:chExt cx="0" cy="0"/>
+        </a:xfrm>
+      </p:grpSpPr>
+      <p:sp>
+        <p:nvSpPr>
+          <p:cNvPr id="2" name="Slide Image Placeholder 1"/>
+          <p:cNvSpPr>
+            <a:spLocks noGrp="1" noRot="1" noChangeAspect="1"/>
+          </p:cNvSpPr>
+          <p:nvPr>
+            <p:ph type="sldImg"/>
+          </p:nvPr>
+        </p:nvSpPr>
+        <p:spPr/>
+      </p:sp>
+      <p:sp>
+        <p:nvSpPr>
+          <p:cNvPr id="3" name="Notes Placeholder 2"/>
+          <p:cNvSpPr>
+            <a:spLocks noGrp="1"/>
+          </p:cNvSpPr>
+          <p:nvPr>
+            <p:ph type="body" idx="1"/>
+          </p:nvPr>
+        </p:nvSpPr>
+        <p:spPr/>
+        <p:txBody>
+          <a:bodyPr/>
+          <a:lstStyle/>
+          <a:p>
+            <a:r>
+              <a:rPr lang="en-US" dirty="0"/>
+              <a:t>Notas: Para quem já tem os três canais fechados. Alternativa: comparar a máscara por condição com o nó SimpleMask do Node System (3DCoatTextura 2026), ou com a técnica de nós procedurais do Blender (Apostila, Cap. 13), em uma segunda superfície.</a:t>
+            </a:r>
+            <a:endParaRPr lang="en-US" dirty="0"/>
+          </a:p>
+        </p:txBody>
+      </p:sp>
+      <p:sp>
+        <p:nvSpPr>
+          <p:cNvPr id="4" name="Slide Number Placeholder 3"/>
+          <p:cNvSpPr>
+            <a:spLocks noGrp="1"/>
+          </p:cNvSpPr>
+          <p:nvPr>
+            <p:ph type="sldNum" sz="quarter" idx="10"/>
+          </p:nvPr>
+        </p:nvSpPr>
+        <p:spPr/>
+        <p:txBody>
+          <a:bodyPr/>
+          <a:lstStyle/>
+          <a:p>
+            <a:fld id="{F7021451-1387-4CA6-816F-3879F97B5CBC}" type="slidenum">
+              <a:rPr lang="en-US"/>
+              <a:t>26</a:t>
+            </a:fld>
+            <a:endParaRPr lang="en-US"/>
+          </a:p>
+        </p:txBody>
+      </p:sp>
+    </p:spTree>
+    <p:extLst>
+      <p:ext uri="{BB962C8B-B14F-4D97-AF65-F5344CB8AC3E}">
+        <p14:creationId xmlns:p14="http://schemas.microsoft.com/office/powerpoint/2010/main" val="1024086991"/>
+      </p:ext>
+    </p:extLst>
+  </p:cSld>
+  <p:clrMapOvr>
+    <a:masterClrMapping/>
+  </p:clrMapOvr>
+</p:notes>
+</file>
+
+<file path=ppt/notesSlides/notesSlide27.xml><?xml version="1.0" encoding="utf-8"?>
+<p:notes xmlns:a="http://schemas.openxmlformats.org/drawingml/2006/main" xmlns:r="http://schemas.openxmlformats.org/officeDocument/2006/relationships" xmlns:p="http://schemas.openxmlformats.org/presentationml/2006/main">
+  <p:cSld>
+    <p:spTree>
+      <p:nvGrpSpPr>
+        <p:cNvPr id="1" name=""/>
+        <p:cNvGrpSpPr/>
+        <p:nvPr/>
+      </p:nvGrpSpPr>
+      <p:grpSpPr>
+        <a:xfrm>
+          <a:off x="0" y="0"/>
+          <a:ext cx="0" cy="0"/>
+          <a:chOff x="0" y="0"/>
+          <a:chExt cx="0" cy="0"/>
+        </a:xfrm>
+      </p:grpSpPr>
+      <p:sp>
+        <p:nvSpPr>
+          <p:cNvPr id="2" name="Slide Image Placeholder 1"/>
+          <p:cNvSpPr>
+            <a:spLocks noGrp="1" noRot="1" noChangeAspect="1"/>
+          </p:cNvSpPr>
+          <p:nvPr>
+            <p:ph type="sldImg"/>
+          </p:nvPr>
+        </p:nvSpPr>
+        <p:spPr/>
+      </p:sp>
+      <p:sp>
+        <p:nvSpPr>
+          <p:cNvPr id="3" name="Notes Placeholder 2"/>
+          <p:cNvSpPr>
+            <a:spLocks noGrp="1"/>
+          </p:cNvSpPr>
+          <p:nvPr>
+            <p:ph type="body" idx="1"/>
+          </p:nvPr>
+        </p:nvSpPr>
+        <p:spPr/>
+        <p:txBody>
+          <a:bodyPr/>
+          <a:lstStyle/>
+          <a:p>
+            <a:r>
+              <a:rPr lang="en-US" dirty="0"/>
+              <a:t>Notas: Fechamento (10 min): "Hoje vocês montaram um material PBR completo pela primeira vez dentro do 3DCoatTextura — com profundidade vinda da própria malha e do pincel, não de nós matemáticos." Ponte: na Semana 8 o material é refinado e exportado com os quatro mapas PBR completos.</a:t>
+            </a:r>
+            <a:endParaRPr lang="en-US" dirty="0"/>
+          </a:p>
+        </p:txBody>
+      </p:sp>
+      <p:sp>
+        <p:nvSpPr>
+          <p:cNvPr id="4" name="Slide Number Placeholder 3"/>
+          <p:cNvSpPr>
+            <a:spLocks noGrp="1"/>
+          </p:cNvSpPr>
+          <p:nvPr>
+            <p:ph type="sldNum" sz="quarter" idx="10"/>
+          </p:nvPr>
+        </p:nvSpPr>
+        <p:spPr/>
+        <p:txBody>
+          <a:bodyPr/>
+          <a:lstStyle/>
+          <a:p>
+            <a:fld id="{F7021451-1387-4CA6-816F-3879F97B5CBC}" type="slidenum">
+              <a:rPr lang="en-US"/>
+              <a:t>27</a:t>
+            </a:fld>
+            <a:endParaRPr lang="en-US"/>
+          </a:p>
+        </p:txBody>
+      </p:sp>
+    </p:spTree>
+    <p:extLst>
+      <p:ext uri="{BB962C8B-B14F-4D97-AF65-F5344CB8AC3E}">
+        <p14:creationId xmlns:p14="http://schemas.microsoft.com/office/powerpoint/2010/main" val="1024086991"/>
+      </p:ext>
+    </p:extLst>
+  </p:cSld>
+  <p:clrMapOvr>
+    <a:masterClrMapping/>
+  </p:clrMapOvr>
+</p:notes>
+</file>
+
 <file path=ppt/notesSlides/notesSlide3.xml><?xml version="1.0" encoding="utf-8"?>
 <p:notes xmlns:a="http://schemas.openxmlformats.org/drawingml/2006/main" xmlns:r="http://schemas.openxmlformats.org/officeDocument/2006/relationships" xmlns:p="http://schemas.openxmlformats.org/presentationml/2006/main">
   <p:cSld>
@@ -1848,7 +2298,7 @@
           <a:p>
             <a:r>
               <a:rPr lang="en-US" dirty="0"/>
-              <a:t>Notas: Os três primeiros objetivos são conceituais/mini aula; os demais são o trabalho prático de hoje no estúdio.</a:t>
+              <a:t>Notas: Os quatro primeiros objetivos são da mini aula; os demais são o trabalho prático da demonstração e do estúdio.</a:t>
             </a:r>
             <a:endParaRPr lang="en-US" dirty="0"/>
           </a:p>
@@ -1936,7 +2386,7 @@
           <a:p>
             <a:r>
               <a:rPr lang="en-US" dirty="0"/>
-              <a:t>Notas: Mostrar 3 versões da mesma parede: (1) só Albedo (resultado da Semana 6), (2) com AO multiplicado por cima, (3) com Curvature também aplicado como máscara. Perguntar de onde vem a informação — conduzir a turma a perceber que é a própria geometria (reentrâncias, bordas, bevels), não uma imagem externa.
+              <a:t>Notas: Bloco 1 (3 min). Mostrar 3 versões da mesma parede: (1) só Albedo (resultado da Semana 6), (2) com AO multiplicado por cima, (3) com Curvature também aplicado como máscara. Perguntar de onde vem a informação — conduzir a turma a perceber que é a própria geometria (reentrâncias, bordas, bevels), não uma imagem externa. Não responder por completo agora: a resposta volta no Bloco 5 e na demonstração.
 [!FIGURA]
 Objetivo didático — Evidenciar que AO e Curvature nascem da geometria, sem exigir high-poly nem pintura manual.
 Arquivo sugerido — assets/parede_ao_curvature_comparacao.webp
@@ -2029,7 +2479,7 @@
           <a:p>
             <a:r>
               <a:rPr lang="en-US" dirty="0"/>
-              <a:t>Notas: Frestas/cantos internos = mais escuros no AO (é onde sujeira e sombra de contato se acumulam). Arestas/quinas = onde a pintura descasca e o metal fica exposto — o oposto do que acontece nas reentrâncias.</a:t>
+              <a:t>Notas: Bloco 2 (3 min). A conferência do UV importado é feita na janela Texture Editor, dentro do Paint Room. Se o UV precisar de correção, corrige-se no Blender e reexporta-se. Mencionar que a Pilgway oferece licença educacional/estudantil não comercial — confirmar as condições vigentes antes de divulgar.</a:t>
             </a:r>
             <a:endParaRPr lang="en-US" dirty="0"/>
           </a:p>
@@ -2117,7 +2567,7 @@
           <a:p>
             <a:r>
               <a:rPr lang="en-US" dirty="0"/>
-              <a:t>Notas: Diferença central em relação ao workflow tradicional de produções AAA: lá o Normal nasce da diferença high-poly/low-poly. Aqui, sem high-poly, o Normal nasce de pintura de profundidade.</a:t>
+              <a:t>Notas: Bloco 3 (4 min). Percorrer o que entra e o que sai em cada etapa: Blender (malha low-poly, UV aprovado, transformações aplicadas) → FBX → 3DCoatTextura (.3b com camadas, mapas PBR exportados) → Blender/Unity (material montado). Por isso o UV do Hero Asset precisa estar aprovado antes de começar a pintar: mudar o UV depois obriga a reprojetar a pintura.</a:t>
             </a:r>
             <a:endParaRPr lang="en-US" dirty="0"/>
           </a:p>
@@ -2205,7 +2655,12 @@
           <a:p>
             <a:r>
               <a:rPr lang="en-US" dirty="0"/>
-              <a:t>Notas: Reforçar que não é um recomeço — é uma troca de ferramenta para a mesma tarefa de refinar o material.</a:t>
+              <a:t>Notas: Bloco 4 (5 min para os 4 slides). Resposta: NÃO — a malha não tem UV (UV Editor vazio). O 3DCoatTextura não tem UV Room: abrir o UV no Blender antes de exportar (Smart UV Project para teste; seams manuais para entrega). Cenário 2.
+[!FIGURA]
+Objetivo didático — Reconhecer uma malha sem UV.
+Arquivo sugerido — assets/quiz_k2_sem_uv.webp
+Descrição — Print do Blender com o caixote K2_SemUV selecionado: UV Editor vazio e painel Object Data → UV Maps sem nenhuma entrada.
+Como produzir — Gerar o kit com o script do roteiro do Kit de FBX com defeito e capturar a tela do K2 no Blender.</a:t>
             </a:r>
             <a:endParaRPr lang="en-US" dirty="0"/>
           </a:p>
@@ -2293,7 +2748,12 @@
           <a:p>
             <a:r>
               <a:rPr lang="en-US" dirty="0"/>
-              <a:t>Notas: Quem já baixou uma textura estilizada pronta na Semana 6 usa essa imagem como ponto de partida da camada de Color, do mesmo jeito que a trilha fotorrealista usa a foto.</a:t>
+              <a:t>Notas: Resposta: DEPENDE — o modificador Mirror espelha a geometria sem deslocar o UV: as duas metades usam as mesmas ilhas (sobreposição). O que se pinta de um lado aparece no outro, e o AO calculado pode sair errado. Se a simetria for intencional (economia de texel), tudo bem — só não pintar detalhe assimétrico ali; se não for, separar as ilhas. Cenário 3.
+[!FIGURA]
+Objetivo didático — Reconhecer UV sobreposto gerado por Mirror.
+Arquivo sugerido — assets/quiz_k3_uv_sobreposto.webp
+Descrição — Print do Blender com o K3_UV_Sobreposto: viewport com os dois caixotes espelhados e painel de modificadores mostrando o Mirror (UV U desligado); UV Editor com uma só cópia das ilhas.
+Como produzir — Capturar o K3 do kit no Blender, com o painel de modificadores aberto.</a:t>
             </a:r>
             <a:endParaRPr lang="en-US" dirty="0"/>
           </a:p>
@@ -2381,7 +2841,12 @@
           <a:p>
             <a:r>
               <a:rPr lang="en-US" dirty="0"/>
-              <a:t>Notas: O 3DCoatTextura é a edição do 3DCoat dedicada só à texturização — não tem as salas de escultura, retopologia e modelagem. No workflow da disciplina os UVs já chegam prontos do Blender: a conferência é feita na janela Texture Editor, dentro do Paint Room. Se o UV precisar de correção, corrige-se no Blender e reexporta-se.</a:t>
+              <a:t>Notas: Resposta: NÃO — escala 100 e rotação não aplicadas. Chega gigante ou girado no 3DCoatTextura e na Unity. Correção: Ctrl+A → All Transforms. Cenário 9.
+[!FIGURA]
+Objetivo didático — Reconhecer transformações não aplicadas.
+Arquivo sugerido — assets/quiz_k4_escala.webp
+Descrição — Print do Blender com o K4_Escala_Rotacao selecionado e o painel N (Item) mostrando Scale 100 e rotação diferente de zero.
+Como produzir — Capturar o K4 do kit no Blender com o painel N aberto.</a:t>
             </a:r>
             <a:endParaRPr lang="en-US" dirty="0"/>
           </a:p>
@@ -3279,6 +3744,201 @@
 <file path=ppt/slides/slide22.xml><?xml version="1.0" encoding="utf-8"?>
 <p:sld xmlns:a="http://schemas.openxmlformats.org/drawingml/2006/main" xmlns:r="http://schemas.openxmlformats.org/officeDocument/2006/relationships" xmlns:p="http://schemas.openxmlformats.org/presentationml/2006/main">
   <p:cSld name="Slide 22">
+    <p:bg>
+      <p:bgPr>
+        <a:blipFill dpi="0" rotWithShape="1">
+          <a:blip r:embed="rId1">
+            <a:lum/>
+          </a:blip>
+          <a:srcRect/>
+          <a:stretch>
+            <a:fillRect/>
+          </a:stretch>
+        </a:blipFill>
+        <a:effectLst/>
+      </p:bgPr>
+    </p:bg>
+    <p:spTree>
+      <p:nvGrpSpPr>
+        <p:cNvPr id="1" name=""/>
+        <p:cNvGrpSpPr/>
+        <p:nvPr/>
+      </p:nvGrpSpPr>
+      <p:grpSpPr>
+        <a:xfrm>
+          <a:off x="0" y="0"/>
+          <a:ext cx="0" cy="0"/>
+          <a:chOff x="0" y="0"/>
+          <a:chExt cx="0" cy="0"/>
+        </a:xfrm>
+      </p:grpSpPr>
+    </p:spTree>
+  </p:cSld>
+  <p:clrMapOvr>
+    <a:masterClrMapping/>
+  </p:clrMapOvr>
+</p:sld>
+</file>
+
+<file path=ppt/slides/slide23.xml><?xml version="1.0" encoding="utf-8"?>
+<p:sld xmlns:a="http://schemas.openxmlformats.org/drawingml/2006/main" xmlns:r="http://schemas.openxmlformats.org/officeDocument/2006/relationships" xmlns:p="http://schemas.openxmlformats.org/presentationml/2006/main">
+  <p:cSld name="Slide 23">
+    <p:bg>
+      <p:bgPr>
+        <a:blipFill dpi="0" rotWithShape="1">
+          <a:blip r:embed="rId1">
+            <a:lum/>
+          </a:blip>
+          <a:srcRect/>
+          <a:stretch>
+            <a:fillRect/>
+          </a:stretch>
+        </a:blipFill>
+        <a:effectLst/>
+      </p:bgPr>
+    </p:bg>
+    <p:spTree>
+      <p:nvGrpSpPr>
+        <p:cNvPr id="1" name=""/>
+        <p:cNvGrpSpPr/>
+        <p:nvPr/>
+      </p:nvGrpSpPr>
+      <p:grpSpPr>
+        <a:xfrm>
+          <a:off x="0" y="0"/>
+          <a:ext cx="0" cy="0"/>
+          <a:chOff x="0" y="0"/>
+          <a:chExt cx="0" cy="0"/>
+        </a:xfrm>
+      </p:grpSpPr>
+    </p:spTree>
+  </p:cSld>
+  <p:clrMapOvr>
+    <a:masterClrMapping/>
+  </p:clrMapOvr>
+</p:sld>
+</file>
+
+<file path=ppt/slides/slide24.xml><?xml version="1.0" encoding="utf-8"?>
+<p:sld xmlns:a="http://schemas.openxmlformats.org/drawingml/2006/main" xmlns:r="http://schemas.openxmlformats.org/officeDocument/2006/relationships" xmlns:p="http://schemas.openxmlformats.org/presentationml/2006/main">
+  <p:cSld name="Slide 24">
+    <p:bg>
+      <p:bgPr>
+        <a:blipFill dpi="0" rotWithShape="1">
+          <a:blip r:embed="rId1">
+            <a:lum/>
+          </a:blip>
+          <a:srcRect/>
+          <a:stretch>
+            <a:fillRect/>
+          </a:stretch>
+        </a:blipFill>
+        <a:effectLst/>
+      </p:bgPr>
+    </p:bg>
+    <p:spTree>
+      <p:nvGrpSpPr>
+        <p:cNvPr id="1" name=""/>
+        <p:cNvGrpSpPr/>
+        <p:nvPr/>
+      </p:nvGrpSpPr>
+      <p:grpSpPr>
+        <a:xfrm>
+          <a:off x="0" y="0"/>
+          <a:ext cx="0" cy="0"/>
+          <a:chOff x="0" y="0"/>
+          <a:chExt cx="0" cy="0"/>
+        </a:xfrm>
+      </p:grpSpPr>
+    </p:spTree>
+  </p:cSld>
+  <p:clrMapOvr>
+    <a:masterClrMapping/>
+  </p:clrMapOvr>
+</p:sld>
+</file>
+
+<file path=ppt/slides/slide25.xml><?xml version="1.0" encoding="utf-8"?>
+<p:sld xmlns:a="http://schemas.openxmlformats.org/drawingml/2006/main" xmlns:r="http://schemas.openxmlformats.org/officeDocument/2006/relationships" xmlns:p="http://schemas.openxmlformats.org/presentationml/2006/main">
+  <p:cSld name="Slide 25">
+    <p:bg>
+      <p:bgPr>
+        <a:blipFill dpi="0" rotWithShape="1">
+          <a:blip r:embed="rId1">
+            <a:lum/>
+          </a:blip>
+          <a:srcRect/>
+          <a:stretch>
+            <a:fillRect/>
+          </a:stretch>
+        </a:blipFill>
+        <a:effectLst/>
+      </p:bgPr>
+    </p:bg>
+    <p:spTree>
+      <p:nvGrpSpPr>
+        <p:cNvPr id="1" name=""/>
+        <p:cNvGrpSpPr/>
+        <p:nvPr/>
+      </p:nvGrpSpPr>
+      <p:grpSpPr>
+        <a:xfrm>
+          <a:off x="0" y="0"/>
+          <a:ext cx="0" cy="0"/>
+          <a:chOff x="0" y="0"/>
+          <a:chExt cx="0" cy="0"/>
+        </a:xfrm>
+      </p:grpSpPr>
+    </p:spTree>
+  </p:cSld>
+  <p:clrMapOvr>
+    <a:masterClrMapping/>
+  </p:clrMapOvr>
+</p:sld>
+</file>
+
+<file path=ppt/slides/slide26.xml><?xml version="1.0" encoding="utf-8"?>
+<p:sld xmlns:a="http://schemas.openxmlformats.org/drawingml/2006/main" xmlns:r="http://schemas.openxmlformats.org/officeDocument/2006/relationships" xmlns:p="http://schemas.openxmlformats.org/presentationml/2006/main">
+  <p:cSld name="Slide 26">
+    <p:bg>
+      <p:bgPr>
+        <a:blipFill dpi="0" rotWithShape="1">
+          <a:blip r:embed="rId1">
+            <a:lum/>
+          </a:blip>
+          <a:srcRect/>
+          <a:stretch>
+            <a:fillRect/>
+          </a:stretch>
+        </a:blipFill>
+        <a:effectLst/>
+      </p:bgPr>
+    </p:bg>
+    <p:spTree>
+      <p:nvGrpSpPr>
+        <p:cNvPr id="1" name=""/>
+        <p:cNvGrpSpPr/>
+        <p:nvPr/>
+      </p:nvGrpSpPr>
+      <p:grpSpPr>
+        <a:xfrm>
+          <a:off x="0" y="0"/>
+          <a:ext cx="0" cy="0"/>
+          <a:chOff x="0" y="0"/>
+          <a:chExt cx="0" cy="0"/>
+        </a:xfrm>
+      </p:grpSpPr>
+    </p:spTree>
+  </p:cSld>
+  <p:clrMapOvr>
+    <a:masterClrMapping/>
+  </p:clrMapOvr>
+</p:sld>
+</file>
+
+<file path=ppt/slides/slide27.xml><?xml version="1.0" encoding="utf-8"?>
+<p:sld xmlns:a="http://schemas.openxmlformats.org/drawingml/2006/main" xmlns:r="http://schemas.openxmlformats.org/officeDocument/2006/relationships" xmlns:p="http://schemas.openxmlformats.org/presentationml/2006/main">
+  <p:cSld name="Slide 27">
     <p:bg>
       <p:bgPr>
         <a:blipFill dpi="0" rotWithShape="1">
